--- a/assets/presentations/diaporamas/P3-les-questions-de-conformite.pptx
+++ b/assets/presentations/diaporamas/P3-les-questions-de-conformite.pptx
@@ -16,6 +16,8 @@
     <p:sldId id="264" r:id="rId16"/>
     <p:sldId id="265" r:id="rId17"/>
     <p:sldId id="266" r:id="rId18"/>
+    <p:sldId id="267" r:id="rId19"/>
+    <p:sldId id="268" r:id="rId20"/>
   </p:sldIdLst>
   <p:sldSz cx="12191695" cy="6858000" type="screen4x3"/>
   <p:notesSz cx="6858000" cy="9144000"/>
@@ -582,7 +584,7 @@
           <a:lstStyle/>
           <a:p>
             <a:r>
-              <a:t>Terminer là-dessus : ce sont des décisions d'organisme, pas des fonctionnalités à attendre.</a:t>
+              <a:t>Si la personne insiste, proposer le mode sans assistant : plus aucun texte d'élève ne quitte le serveur, et la question tombe.</a:t>
             </a:r>
           </a:p>
         </p:txBody>
@@ -652,6 +654,146 @@
           <a:lstStyle/>
           <a:p>
             <a:r>
+              <a:t>Terminer là-dessus : ce sont des décisions d'organisme, pas des fonctionnalités à attendre.</a:t>
+            </a:r>
+          </a:p>
+        </p:txBody>
+      </p:sp>
+      <p:sp>
+        <p:nvSpPr>
+          <p:cNvPr id="4" name="Slide Number Placeholder 3"/>
+          <p:cNvSpPr>
+            <a:spLocks noGrp="1"/>
+          </p:cNvSpPr>
+          <p:nvPr>
+            <p:ph type="sldNum" idx="5" sz="quarter"/>
+          </p:nvPr>
+        </p:nvSpPr>
+        <p:spPr/>
+      </p:sp>
+    </p:spTree>
+  </p:cSld>
+  <p:clrMapOvr>
+    <a:masterClrMapping/>
+  </p:clrMapOvr>
+</p:notes>
+</file>
+
+<file path=ppt/notesSlides/notesSlide12.xml><?xml version="1.0" encoding="utf-8"?>
+<p:notes xmlns:a="http://schemas.openxmlformats.org/drawingml/2006/main" xmlns:p="http://schemas.openxmlformats.org/presentationml/2006/main" xmlns:r="http://schemas.openxmlformats.org/officeDocument/2006/relationships">
+  <p:cSld>
+    <p:spTree>
+      <p:nvGrpSpPr>
+        <p:cNvPr id="1" name=""/>
+        <p:cNvGrpSpPr/>
+        <p:nvPr/>
+      </p:nvGrpSpPr>
+      <p:grpSpPr>
+        <a:xfrm>
+          <a:off x="0" y="0"/>
+          <a:ext cx="0" cy="0"/>
+          <a:chOff x="0" y="0"/>
+          <a:chExt cx="0" cy="0"/>
+        </a:xfrm>
+      </p:grpSpPr>
+      <p:sp>
+        <p:nvSpPr>
+          <p:cNvPr id="2" name="Slide Image Placeholder 1"/>
+          <p:cNvSpPr>
+            <a:spLocks noGrp="1"/>
+          </p:cNvSpPr>
+          <p:nvPr>
+            <p:ph type="sldImg" idx="2"/>
+          </p:nvPr>
+        </p:nvSpPr>
+        <p:spPr/>
+      </p:sp>
+      <p:sp>
+        <p:nvSpPr>
+          <p:cNvPr id="3" name="Notes Placeholder 2"/>
+          <p:cNvSpPr>
+            <a:spLocks noGrp="1"/>
+          </p:cNvSpPr>
+          <p:nvPr>
+            <p:ph type="body" idx="3" sz="quarter"/>
+          </p:nvPr>
+        </p:nvSpPr>
+        <p:spPr/>
+        <p:txBody>
+          <a:bodyPr/>
+          <a:lstStyle/>
+          <a:p>
+            <a:r>
+              <a:t>C'est la réponse la plus courte à la Loi 25 : on ne protège pas une donnée qu'on n'a pas créée.</a:t>
+            </a:r>
+          </a:p>
+        </p:txBody>
+      </p:sp>
+      <p:sp>
+        <p:nvSpPr>
+          <p:cNvPr id="4" name="Slide Number Placeholder 3"/>
+          <p:cNvSpPr>
+            <a:spLocks noGrp="1"/>
+          </p:cNvSpPr>
+          <p:nvPr>
+            <p:ph type="sldNum" idx="5" sz="quarter"/>
+          </p:nvPr>
+        </p:nvSpPr>
+        <p:spPr/>
+      </p:sp>
+    </p:spTree>
+  </p:cSld>
+  <p:clrMapOvr>
+    <a:masterClrMapping/>
+  </p:clrMapOvr>
+</p:notes>
+</file>
+
+<file path=ppt/notesSlides/notesSlide13.xml><?xml version="1.0" encoding="utf-8"?>
+<p:notes xmlns:a="http://schemas.openxmlformats.org/drawingml/2006/main" xmlns:p="http://schemas.openxmlformats.org/presentationml/2006/main" xmlns:r="http://schemas.openxmlformats.org/officeDocument/2006/relationships">
+  <p:cSld>
+    <p:spTree>
+      <p:nvGrpSpPr>
+        <p:cNvPr id="1" name=""/>
+        <p:cNvGrpSpPr/>
+        <p:nvPr/>
+      </p:nvGrpSpPr>
+      <p:grpSpPr>
+        <a:xfrm>
+          <a:off x="0" y="0"/>
+          <a:ext cx="0" cy="0"/>
+          <a:chOff x="0" y="0"/>
+          <a:chExt cx="0" cy="0"/>
+        </a:xfrm>
+      </p:grpSpPr>
+      <p:sp>
+        <p:nvSpPr>
+          <p:cNvPr id="2" name="Slide Image Placeholder 1"/>
+          <p:cNvSpPr>
+            <a:spLocks noGrp="1"/>
+          </p:cNvSpPr>
+          <p:nvPr>
+            <p:ph type="sldImg" idx="2"/>
+          </p:nvPr>
+        </p:nvSpPr>
+        <p:spPr/>
+      </p:sp>
+      <p:sp>
+        <p:nvSpPr>
+          <p:cNvPr id="3" name="Notes Placeholder 2"/>
+          <p:cNvSpPr>
+            <a:spLocks noGrp="1"/>
+          </p:cNvSpPr>
+          <p:nvPr>
+            <p:ph type="body" idx="3" sz="quarter"/>
+          </p:nvPr>
+        </p:nvSpPr>
+        <p:spPr/>
+        <p:txBody>
+          <a:bodyPr/>
+          <a:lstStyle/>
+          <a:p>
+            <a:r>
               <a:t>Donner le guide en partant. C'est le document qui fait avancer le dossier entre deux rencontres.</a:t>
             </a:r>
           </a:p>
@@ -1142,7 +1284,7 @@
           <a:lstStyle/>
           <a:p>
             <a:r>
-              <a:t>« Hors Québec » comprend l'Ontario : un hébergement à Toronto est une sortie au même titre qu'en Virginie. Le dire avant qu'on le demande.</a:t>
+              <a:t>La question qui suit est toujours « et les données des élèves ? ». La réponse est à l'écran : elles n'y sont pas.</a:t>
             </a:r>
           </a:p>
         </p:txBody>
@@ -1212,7 +1354,7 @@
           <a:lstStyle/>
           <a:p>
             <a:r>
-              <a:t>Si la personne insiste, proposer le mode sans assistant : plus aucun texte d'élève ne quitte le serveur, et la question tombe.</a:t>
+              <a:t>« Hors Québec » comprend l'Ontario : un hébergement à Toronto est une sortie au même titre qu'en Virginie. Le dire avant qu'on le demande.</a:t>
             </a:r>
           </a:p>
         </p:txBody>
@@ -4634,7 +4776,7 @@
                 </a:solidFill>
                 <a:latin typeface="Verdana"/>
               </a:rPr>
-              <a:t>CE QUE LE CENTRE DÉCIDE</a:t>
+              <a:t>L'IDÉE REÇUE</a:t>
             </a:r>
           </a:p>
         </p:txBody>
@@ -4673,7 +4815,7 @@
                 </a:solidFill>
                 <a:latin typeface="Verdana"/>
               </a:rPr>
-              <a:t>Quatre décisions qui ne sont pas techniques</a:t>
+              <a:t>Le piège le plus fréquent</a:t>
             </a:r>
           </a:p>
         </p:txBody>
@@ -4686,12 +4828,260 @@
         </p:nvSpPr>
         <p:spPr>
           <a:xfrm>
-            <a:off x="566928" y="1810512"/>
-            <a:ext cx="11057839" cy="2932176"/>
+            <a:off x="566928" y="1856232"/>
+            <a:ext cx="5428335" cy="2331720"/>
           </a:xfrm>
           <a:prstGeom prst="roundRect">
             <a:avLst>
-              <a:gd name="adj" fmla="val 4989"/>
+              <a:gd name="adj" fmla="val 6274"/>
+            </a:avLst>
+          </a:prstGeom>
+          <a:solidFill>
+            <a:srgbClr val="FFF6F5"/>
+          </a:solidFill>
+          <a:ln w="12700">
+            <a:solidFill>
+              <a:srgbClr val="DC2626"/>
+            </a:solidFill>
+          </a:ln>
+          <a:effectLst/>
+        </p:spPr>
+        <p:style>
+          <a:lnRef idx="1">
+            <a:schemeClr val="accent1"/>
+          </a:lnRef>
+          <a:fillRef idx="3">
+            <a:schemeClr val="accent1"/>
+          </a:fillRef>
+          <a:effectRef idx="2">
+            <a:schemeClr val="accent1"/>
+          </a:effectRef>
+          <a:fontRef idx="minor">
+            <a:schemeClr val="lt1"/>
+          </a:fontRef>
+        </p:style>
+        <p:txBody>
+          <a:bodyPr rtlCol="0" anchor="ctr"/>
+          <a:lstStyle/>
+          <a:p/>
+        </p:txBody>
+      </p:sp>
+      <p:sp>
+        <p:nvSpPr>
+          <p:cNvPr id="8" name="TextBox 7"/>
+          <p:cNvSpPr txBox="1"/>
+          <p:nvPr/>
+        </p:nvSpPr>
+        <p:spPr>
+          <a:xfrm>
+            <a:off x="932688" y="2130552"/>
+            <a:ext cx="4696815" cy="274320"/>
+          </a:xfrm>
+          <a:prstGeom prst="rect">
+            <a:avLst/>
+          </a:prstGeom>
+          <a:noFill/>
+        </p:spPr>
+        <p:txBody>
+          <a:bodyPr wrap="square" lIns="0" rIns="0" tIns="0" bIns="0" anchor="t">
+            <a:spAutoFit/>
+          </a:bodyPr>
+          <a:lstStyle/>
+          <a:p>
+            <a:pPr algn="l">
+              <a:lnSpc>
+                <a:spcPct val="135000"/>
+              </a:lnSpc>
+            </a:pPr>
+            <a:r>
+              <a:rPr sz="1300" b="1" i="0" spc="156">
+                <a:solidFill>
+                  <a:srgbClr val="B91C1C"/>
+                </a:solidFill>
+                <a:latin typeface="Verdana"/>
+              </a:rPr>
+              <a:t>ON ENTEND SOUVENT</a:t>
+            </a:r>
+          </a:p>
+        </p:txBody>
+      </p:sp>
+      <p:sp>
+        <p:nvSpPr>
+          <p:cNvPr id="9" name="TextBox 8"/>
+          <p:cNvSpPr txBox="1"/>
+          <p:nvPr/>
+        </p:nvSpPr>
+        <p:spPr>
+          <a:xfrm>
+            <a:off x="932688" y="2569464"/>
+            <a:ext cx="4696815" cy="1417320"/>
+          </a:xfrm>
+          <a:prstGeom prst="rect">
+            <a:avLst/>
+          </a:prstGeom>
+          <a:noFill/>
+        </p:spPr>
+        <p:txBody>
+          <a:bodyPr wrap="square" lIns="0" rIns="0" tIns="0" bIns="0" anchor="t">
+            <a:spAutoFit/>
+          </a:bodyPr>
+          <a:lstStyle/>
+          <a:p>
+            <a:pPr algn="l">
+              <a:lnSpc>
+                <a:spcPct val="130000"/>
+              </a:lnSpc>
+            </a:pPr>
+            <a:r>
+              <a:rPr sz="2500" b="1" i="0">
+                <a:solidFill>
+                  <a:srgbClr val="17181A"/>
+                </a:solidFill>
+                <a:latin typeface="Verdana"/>
+              </a:rPr>
+              <a:t>« Il faut héberger au Québec. »</a:t>
+            </a:r>
+          </a:p>
+        </p:txBody>
+      </p:sp>
+      <p:sp>
+        <p:nvSpPr>
+          <p:cNvPr id="10" name="Rounded Rectangle 9"/>
+          <p:cNvSpPr/>
+          <p:nvPr/>
+        </p:nvSpPr>
+        <p:spPr>
+          <a:xfrm>
+            <a:off x="6196431" y="1856232"/>
+            <a:ext cx="5428335" cy="2331720"/>
+          </a:xfrm>
+          <a:prstGeom prst="roundRect">
+            <a:avLst>
+              <a:gd name="adj" fmla="val 6274"/>
+            </a:avLst>
+          </a:prstGeom>
+          <a:solidFill>
+            <a:srgbClr val="E6F5EE"/>
+          </a:solidFill>
+          <a:ln w="12700">
+            <a:solidFill>
+              <a:srgbClr val="0A8F5B"/>
+            </a:solidFill>
+          </a:ln>
+          <a:effectLst/>
+        </p:spPr>
+        <p:style>
+          <a:lnRef idx="1">
+            <a:schemeClr val="accent1"/>
+          </a:lnRef>
+          <a:fillRef idx="3">
+            <a:schemeClr val="accent1"/>
+          </a:fillRef>
+          <a:effectRef idx="2">
+            <a:schemeClr val="accent1"/>
+          </a:effectRef>
+          <a:fontRef idx="minor">
+            <a:schemeClr val="lt1"/>
+          </a:fontRef>
+        </p:style>
+        <p:txBody>
+          <a:bodyPr rtlCol="0" anchor="ctr"/>
+          <a:lstStyle/>
+          <a:p/>
+        </p:txBody>
+      </p:sp>
+      <p:sp>
+        <p:nvSpPr>
+          <p:cNvPr id="11" name="TextBox 10"/>
+          <p:cNvSpPr txBox="1"/>
+          <p:nvPr/>
+        </p:nvSpPr>
+        <p:spPr>
+          <a:xfrm>
+            <a:off x="6562191" y="2130552"/>
+            <a:ext cx="4696815" cy="274320"/>
+          </a:xfrm>
+          <a:prstGeom prst="rect">
+            <a:avLst/>
+          </a:prstGeom>
+          <a:noFill/>
+        </p:spPr>
+        <p:txBody>
+          <a:bodyPr wrap="square" lIns="0" rIns="0" tIns="0" bIns="0" anchor="t">
+            <a:spAutoFit/>
+          </a:bodyPr>
+          <a:lstStyle/>
+          <a:p>
+            <a:pPr algn="l">
+              <a:lnSpc>
+                <a:spcPct val="135000"/>
+              </a:lnSpc>
+            </a:pPr>
+            <a:r>
+              <a:rPr sz="1300" b="1" i="0" spc="156">
+                <a:solidFill>
+                  <a:srgbClr val="07734A"/>
+                </a:solidFill>
+                <a:latin typeface="Verdana"/>
+              </a:rPr>
+              <a:t>IL FAUT DIRE PLUTÔT</a:t>
+            </a:r>
+          </a:p>
+        </p:txBody>
+      </p:sp>
+      <p:sp>
+        <p:nvSpPr>
+          <p:cNvPr id="12" name="TextBox 11"/>
+          <p:cNvSpPr txBox="1"/>
+          <p:nvPr/>
+        </p:nvSpPr>
+        <p:spPr>
+          <a:xfrm>
+            <a:off x="6562191" y="2569464"/>
+            <a:ext cx="4696815" cy="1417320"/>
+          </a:xfrm>
+          <a:prstGeom prst="rect">
+            <a:avLst/>
+          </a:prstGeom>
+          <a:noFill/>
+        </p:spPr>
+        <p:txBody>
+          <a:bodyPr wrap="square" lIns="0" rIns="0" tIns="0" bIns="0" anchor="t">
+            <a:spAutoFit/>
+          </a:bodyPr>
+          <a:lstStyle/>
+          <a:p>
+            <a:pPr algn="l">
+              <a:lnSpc>
+                <a:spcPct val="130000"/>
+              </a:lnSpc>
+            </a:pPr>
+            <a:r>
+              <a:rPr sz="2500" b="1" i="0">
+                <a:solidFill>
+                  <a:srgbClr val="17181A"/>
+                </a:solidFill>
+                <a:latin typeface="Verdana"/>
+              </a:rPr>
+              <a:t>« Il faut avoir fait l'évaluation, et l'avoir écrite. »</a:t>
+            </a:r>
+          </a:p>
+        </p:txBody>
+      </p:sp>
+      <p:sp>
+        <p:nvSpPr>
+          <p:cNvPr id="13" name="Rounded Rectangle 12"/>
+          <p:cNvSpPr/>
+          <p:nvPr/>
+        </p:nvSpPr>
+        <p:spPr>
+          <a:xfrm>
+            <a:off x="566928" y="4462272"/>
+            <a:ext cx="11057839" cy="1285240"/>
+          </a:xfrm>
+          <a:prstGeom prst="roundRect">
+            <a:avLst>
+              <a:gd name="adj" fmla="val 11383"/>
             </a:avLst>
           </a:prstGeom>
           <a:solidFill>
@@ -4726,576 +5116,14 @@
       </p:sp>
       <p:sp>
         <p:nvSpPr>
-          <p:cNvPr id="8" name="TextBox 7"/>
-          <p:cNvSpPr txBox="1"/>
-          <p:nvPr/>
-        </p:nvSpPr>
-        <p:spPr>
-          <a:xfrm>
-            <a:off x="932688" y="1975104"/>
-            <a:ext cx="3291492" cy="237744"/>
-          </a:xfrm>
-          <a:prstGeom prst="rect">
-            <a:avLst/>
-          </a:prstGeom>
-          <a:noFill/>
-        </p:spPr>
-        <p:txBody>
-          <a:bodyPr wrap="square" lIns="0" rIns="0" tIns="0" bIns="0" anchor="t">
-            <a:spAutoFit/>
-          </a:bodyPr>
-          <a:lstStyle/>
-          <a:p>
-            <a:pPr algn="l">
-              <a:lnSpc>
-                <a:spcPct val="135000"/>
-              </a:lnSpc>
-            </a:pPr>
-            <a:r>
-              <a:rPr sz="1300" b="1" i="0" spc="156">
-                <a:solidFill>
-                  <a:srgbClr val="6E7175"/>
-                </a:solidFill>
-                <a:latin typeface="Verdana"/>
-              </a:rPr>
-              <a:t>LA DÉCISION</a:t>
-            </a:r>
-          </a:p>
-        </p:txBody>
-      </p:sp>
-      <p:sp>
-        <p:nvSpPr>
-          <p:cNvPr id="9" name="TextBox 8"/>
-          <p:cNvSpPr txBox="1"/>
-          <p:nvPr/>
-        </p:nvSpPr>
-        <p:spPr>
-          <a:xfrm>
-            <a:off x="4443636" y="1975104"/>
-            <a:ext cx="6595914" cy="237744"/>
-          </a:xfrm>
-          <a:prstGeom prst="rect">
-            <a:avLst/>
-          </a:prstGeom>
-          <a:noFill/>
-        </p:spPr>
-        <p:txBody>
-          <a:bodyPr wrap="square" lIns="0" rIns="0" tIns="0" bIns="0" anchor="t">
-            <a:spAutoFit/>
-          </a:bodyPr>
-          <a:lstStyle/>
-          <a:p>
-            <a:pPr algn="l">
-              <a:lnSpc>
-                <a:spcPct val="135000"/>
-              </a:lnSpc>
-            </a:pPr>
-            <a:r>
-              <a:rPr sz="1300" b="1" i="0" spc="156">
-                <a:solidFill>
-                  <a:srgbClr val="6E7175"/>
-                </a:solidFill>
-                <a:latin typeface="Verdana"/>
-              </a:rPr>
-              <a:t>CE QU'ELLE DEMANDE</a:t>
-            </a:r>
-          </a:p>
-        </p:txBody>
-      </p:sp>
-      <p:sp>
-        <p:nvSpPr>
-          <p:cNvPr id="10" name="TextBox 9"/>
-          <p:cNvSpPr txBox="1"/>
-          <p:nvPr/>
-        </p:nvSpPr>
-        <p:spPr>
-          <a:xfrm>
-            <a:off x="932688" y="2395728"/>
-            <a:ext cx="3291492" cy="573024"/>
-          </a:xfrm>
-          <a:prstGeom prst="rect">
-            <a:avLst/>
-          </a:prstGeom>
-          <a:noFill/>
-        </p:spPr>
-        <p:txBody>
-          <a:bodyPr wrap="square" lIns="0" rIns="0" tIns="0" bIns="0" anchor="t">
-            <a:spAutoFit/>
-          </a:bodyPr>
-          <a:lstStyle/>
-          <a:p>
-            <a:pPr algn="l">
-              <a:lnSpc>
-                <a:spcPct val="132000"/>
-              </a:lnSpc>
-            </a:pPr>
-            <a:r>
-              <a:rPr sz="1600" b="0" i="0">
-                <a:solidFill>
-                  <a:srgbClr val="3A3D40"/>
-                </a:solidFill>
-                <a:latin typeface="Verdana"/>
-              </a:rPr>
-              <a:t>La durée de conservation</a:t>
-            </a:r>
-          </a:p>
-        </p:txBody>
-      </p:sp>
-      <p:sp>
-        <p:nvSpPr>
-          <p:cNvPr id="11" name="TextBox 10"/>
-          <p:cNvSpPr txBox="1"/>
-          <p:nvPr/>
-        </p:nvSpPr>
-        <p:spPr>
-          <a:xfrm>
-            <a:off x="4443636" y="2395728"/>
-            <a:ext cx="6595914" cy="573024"/>
-          </a:xfrm>
-          <a:prstGeom prst="rect">
-            <a:avLst/>
-          </a:prstGeom>
-          <a:noFill/>
-        </p:spPr>
-        <p:txBody>
-          <a:bodyPr wrap="square" lIns="0" rIns="0" tIns="0" bIns="0" anchor="t">
-            <a:spAutoFit/>
-          </a:bodyPr>
-          <a:lstStyle/>
-          <a:p>
-            <a:pPr algn="l">
-              <a:lnSpc>
-                <a:spcPct val="132000"/>
-              </a:lnSpc>
-            </a:pPr>
-            <a:r>
-              <a:rPr sz="1600" b="0" i="0">
-                <a:solidFill>
-                  <a:srgbClr val="3A3D40"/>
-                </a:solidFill>
-                <a:latin typeface="Verdana"/>
-              </a:rPr>
-              <a:t>combien de temps on garde les traces d'un élève après son départ</a:t>
-            </a:r>
-          </a:p>
-        </p:txBody>
-      </p:sp>
-      <p:sp>
-        <p:nvSpPr>
-          <p:cNvPr id="12" name="Rectangle 11"/>
-          <p:cNvSpPr/>
-          <p:nvPr/>
-        </p:nvSpPr>
-        <p:spPr>
-          <a:xfrm>
-            <a:off x="932688" y="3041904"/>
-            <a:ext cx="10326319" cy="10058"/>
-          </a:xfrm>
-          <a:prstGeom prst="rect">
-            <a:avLst/>
-          </a:prstGeom>
-          <a:solidFill>
-            <a:srgbClr val="EAEAE8"/>
-          </a:solidFill>
-          <a:ln>
-            <a:noFill/>
-          </a:ln>
-          <a:effectLst/>
-        </p:spPr>
-        <p:style>
-          <a:lnRef idx="1">
-            <a:schemeClr val="accent1"/>
-          </a:lnRef>
-          <a:fillRef idx="3">
-            <a:schemeClr val="accent1"/>
-          </a:fillRef>
-          <a:effectRef idx="2">
-            <a:schemeClr val="accent1"/>
-          </a:effectRef>
-          <a:fontRef idx="minor">
-            <a:schemeClr val="lt1"/>
-          </a:fontRef>
-        </p:style>
-        <p:txBody>
-          <a:bodyPr rtlCol="0" anchor="ctr"/>
-          <a:lstStyle/>
-          <a:p/>
-        </p:txBody>
-      </p:sp>
-      <p:sp>
-        <p:nvSpPr>
-          <p:cNvPr id="13" name="TextBox 12"/>
-          <p:cNvSpPr txBox="1"/>
-          <p:nvPr/>
-        </p:nvSpPr>
-        <p:spPr>
-          <a:xfrm>
-            <a:off x="932688" y="3169920"/>
-            <a:ext cx="3291492" cy="304800"/>
-          </a:xfrm>
-          <a:prstGeom prst="rect">
-            <a:avLst/>
-          </a:prstGeom>
-          <a:noFill/>
-        </p:spPr>
-        <p:txBody>
-          <a:bodyPr wrap="square" lIns="0" rIns="0" tIns="0" bIns="0" anchor="t">
-            <a:spAutoFit/>
-          </a:bodyPr>
-          <a:lstStyle/>
-          <a:p>
-            <a:pPr algn="l">
-              <a:lnSpc>
-                <a:spcPct val="132000"/>
-              </a:lnSpc>
-            </a:pPr>
-            <a:r>
-              <a:rPr sz="1600" b="0" i="0">
-                <a:solidFill>
-                  <a:srgbClr val="3A3D40"/>
-                </a:solidFill>
-                <a:latin typeface="Verdana"/>
-              </a:rPr>
-              <a:t>La communication hors Québec</a:t>
-            </a:r>
-          </a:p>
-        </p:txBody>
-      </p:sp>
-      <p:sp>
-        <p:nvSpPr>
           <p:cNvPr id="14" name="TextBox 13"/>
           <p:cNvSpPr txBox="1"/>
           <p:nvPr/>
         </p:nvSpPr>
         <p:spPr>
           <a:xfrm>
-            <a:off x="4443636" y="3169920"/>
-            <a:ext cx="6595914" cy="304800"/>
-          </a:xfrm>
-          <a:prstGeom prst="rect">
-            <a:avLst/>
-          </a:prstGeom>
-          <a:noFill/>
-        </p:spPr>
-        <p:txBody>
-          <a:bodyPr wrap="square" lIns="0" rIns="0" tIns="0" bIns="0" anchor="t">
-            <a:spAutoFit/>
-          </a:bodyPr>
-          <a:lstStyle/>
-          <a:p>
-            <a:pPr algn="l">
-              <a:lnSpc>
-                <a:spcPct val="132000"/>
-              </a:lnSpc>
-            </a:pPr>
-            <a:r>
-              <a:rPr sz="1600" b="0" i="0">
-                <a:solidFill>
-                  <a:srgbClr val="3A3D40"/>
-                </a:solidFill>
-                <a:latin typeface="Verdana"/>
-              </a:rPr>
-              <a:t>l'évaluation, la conclusion, l'entente</a:t>
-            </a:r>
-          </a:p>
-        </p:txBody>
-      </p:sp>
-      <p:sp>
-        <p:nvSpPr>
-          <p:cNvPr id="15" name="Rectangle 14"/>
-          <p:cNvSpPr/>
-          <p:nvPr/>
-        </p:nvSpPr>
-        <p:spPr>
-          <a:xfrm>
-            <a:off x="932688" y="3547872"/>
-            <a:ext cx="10326319" cy="10058"/>
-          </a:xfrm>
-          <a:prstGeom prst="rect">
-            <a:avLst/>
-          </a:prstGeom>
-          <a:solidFill>
-            <a:srgbClr val="EAEAE8"/>
-          </a:solidFill>
-          <a:ln>
-            <a:noFill/>
-          </a:ln>
-          <a:effectLst/>
-        </p:spPr>
-        <p:style>
-          <a:lnRef idx="1">
-            <a:schemeClr val="accent1"/>
-          </a:lnRef>
-          <a:fillRef idx="3">
-            <a:schemeClr val="accent1"/>
-          </a:fillRef>
-          <a:effectRef idx="2">
-            <a:schemeClr val="accent1"/>
-          </a:effectRef>
-          <a:fontRef idx="minor">
-            <a:schemeClr val="lt1"/>
-          </a:fontRef>
-        </p:style>
-        <p:txBody>
-          <a:bodyPr rtlCol="0" anchor="ctr"/>
-          <a:lstStyle/>
-          <a:p/>
-        </p:txBody>
-      </p:sp>
-      <p:sp>
-        <p:nvSpPr>
-          <p:cNvPr id="16" name="TextBox 15"/>
-          <p:cNvSpPr txBox="1"/>
-          <p:nvPr/>
-        </p:nvSpPr>
-        <p:spPr>
-          <a:xfrm>
-            <a:off x="932688" y="3675887"/>
-            <a:ext cx="3291492" cy="304800"/>
-          </a:xfrm>
-          <a:prstGeom prst="rect">
-            <a:avLst/>
-          </a:prstGeom>
-          <a:noFill/>
-        </p:spPr>
-        <p:txBody>
-          <a:bodyPr wrap="square" lIns="0" rIns="0" tIns="0" bIns="0" anchor="t">
-            <a:spAutoFit/>
-          </a:bodyPr>
-          <a:lstStyle/>
-          <a:p>
-            <a:pPr algn="l">
-              <a:lnSpc>
-                <a:spcPct val="132000"/>
-              </a:lnSpc>
-            </a:pPr>
-            <a:r>
-              <a:rPr sz="1600" b="0" i="0">
-                <a:solidFill>
-                  <a:srgbClr val="3A3D40"/>
-                </a:solidFill>
-                <a:latin typeface="Verdana"/>
-              </a:rPr>
-              <a:t>Qui a accès</a:t>
-            </a:r>
-          </a:p>
-        </p:txBody>
-      </p:sp>
-      <p:sp>
-        <p:nvSpPr>
-          <p:cNvPr id="17" name="TextBox 16"/>
-          <p:cNvSpPr txBox="1"/>
-          <p:nvPr/>
-        </p:nvSpPr>
-        <p:spPr>
-          <a:xfrm>
-            <a:off x="4443636" y="3675887"/>
-            <a:ext cx="6595914" cy="304800"/>
-          </a:xfrm>
-          <a:prstGeom prst="rect">
-            <a:avLst/>
-          </a:prstGeom>
-          <a:noFill/>
-        </p:spPr>
-        <p:txBody>
-          <a:bodyPr wrap="square" lIns="0" rIns="0" tIns="0" bIns="0" anchor="t">
-            <a:spAutoFit/>
-          </a:bodyPr>
-          <a:lstStyle/>
-          <a:p>
-            <a:pPr algn="l">
-              <a:lnSpc>
-                <a:spcPct val="132000"/>
-              </a:lnSpc>
-            </a:pPr>
-            <a:r>
-              <a:rPr sz="1600" b="0" i="0">
-                <a:solidFill>
-                  <a:srgbClr val="3A3D40"/>
-                </a:solidFill>
-                <a:latin typeface="Verdana"/>
-              </a:rPr>
-              <a:t>les comptes de direction, et ce qu'ils voient</a:t>
-            </a:r>
-          </a:p>
-        </p:txBody>
-      </p:sp>
-      <p:sp>
-        <p:nvSpPr>
-          <p:cNvPr id="18" name="Rectangle 17"/>
-          <p:cNvSpPr/>
-          <p:nvPr/>
-        </p:nvSpPr>
-        <p:spPr>
-          <a:xfrm>
-            <a:off x="932688" y="4053840"/>
-            <a:ext cx="10326319" cy="10058"/>
-          </a:xfrm>
-          <a:prstGeom prst="rect">
-            <a:avLst/>
-          </a:prstGeom>
-          <a:solidFill>
-            <a:srgbClr val="EAEAE8"/>
-          </a:solidFill>
-          <a:ln>
-            <a:noFill/>
-          </a:ln>
-          <a:effectLst/>
-        </p:spPr>
-        <p:style>
-          <a:lnRef idx="1">
-            <a:schemeClr val="accent1"/>
-          </a:lnRef>
-          <a:fillRef idx="3">
-            <a:schemeClr val="accent1"/>
-          </a:fillRef>
-          <a:effectRef idx="2">
-            <a:schemeClr val="accent1"/>
-          </a:effectRef>
-          <a:fontRef idx="minor">
-            <a:schemeClr val="lt1"/>
-          </a:fontRef>
-        </p:style>
-        <p:txBody>
-          <a:bodyPr rtlCol="0" anchor="ctr"/>
-          <a:lstStyle/>
-          <a:p/>
-        </p:txBody>
-      </p:sp>
-      <p:sp>
-        <p:nvSpPr>
-          <p:cNvPr id="19" name="TextBox 18"/>
-          <p:cNvSpPr txBox="1"/>
-          <p:nvPr/>
-        </p:nvSpPr>
-        <p:spPr>
-          <a:xfrm>
-            <a:off x="932688" y="4181856"/>
-            <a:ext cx="3291492" cy="304800"/>
-          </a:xfrm>
-          <a:prstGeom prst="rect">
-            <a:avLst/>
-          </a:prstGeom>
-          <a:noFill/>
-        </p:spPr>
-        <p:txBody>
-          <a:bodyPr wrap="square" lIns="0" rIns="0" tIns="0" bIns="0" anchor="t">
-            <a:spAutoFit/>
-          </a:bodyPr>
-          <a:lstStyle/>
-          <a:p>
-            <a:pPr algn="l">
-              <a:lnSpc>
-                <a:spcPct val="132000"/>
-              </a:lnSpc>
-            </a:pPr>
-            <a:r>
-              <a:rPr sz="1600" b="0" i="0">
-                <a:solidFill>
-                  <a:srgbClr val="3A3D40"/>
-                </a:solidFill>
-                <a:latin typeface="Verdana"/>
-              </a:rPr>
-              <a:t>Le responsable</a:t>
-            </a:r>
-          </a:p>
-        </p:txBody>
-      </p:sp>
-      <p:sp>
-        <p:nvSpPr>
-          <p:cNvPr id="20" name="TextBox 19"/>
-          <p:cNvSpPr txBox="1"/>
-          <p:nvPr/>
-        </p:nvSpPr>
-        <p:spPr>
-          <a:xfrm>
-            <a:off x="4443636" y="4181856"/>
-            <a:ext cx="6595914" cy="304800"/>
-          </a:xfrm>
-          <a:prstGeom prst="rect">
-            <a:avLst/>
-          </a:prstGeom>
-          <a:noFill/>
-        </p:spPr>
-        <p:txBody>
-          <a:bodyPr wrap="square" lIns="0" rIns="0" tIns="0" bIns="0" anchor="t">
-            <a:spAutoFit/>
-          </a:bodyPr>
-          <a:lstStyle/>
-          <a:p>
-            <a:pPr algn="l">
-              <a:lnSpc>
-                <a:spcPct val="132000"/>
-              </a:lnSpc>
-            </a:pPr>
-            <a:r>
-              <a:rPr sz="1600" b="0" i="0">
-                <a:solidFill>
-                  <a:srgbClr val="3A3D40"/>
-                </a:solidFill>
-                <a:latin typeface="Verdana"/>
-              </a:rPr>
-              <a:t>la personne qui répond d'une demande d'accès</a:t>
-            </a:r>
-          </a:p>
-        </p:txBody>
-      </p:sp>
-      <p:sp>
-        <p:nvSpPr>
-          <p:cNvPr id="21" name="Rounded Rectangle 20"/>
-          <p:cNvSpPr/>
-          <p:nvPr/>
-        </p:nvSpPr>
-        <p:spPr>
-          <a:xfrm>
-            <a:off x="566928" y="4980432"/>
-            <a:ext cx="11057839" cy="769874"/>
-          </a:xfrm>
-          <a:prstGeom prst="roundRect">
-            <a:avLst>
-              <a:gd name="adj" fmla="val 19003"/>
-            </a:avLst>
-          </a:prstGeom>
-          <a:solidFill>
-            <a:srgbClr val="FBFBFA"/>
-          </a:solidFill>
-          <a:ln w="12700">
-            <a:solidFill>
-              <a:srgbClr val="EAEAE8"/>
-            </a:solidFill>
-          </a:ln>
-          <a:effectLst/>
-        </p:spPr>
-        <p:style>
-          <a:lnRef idx="1">
-            <a:schemeClr val="accent1"/>
-          </a:lnRef>
-          <a:fillRef idx="3">
-            <a:schemeClr val="accent1"/>
-          </a:fillRef>
-          <a:effectRef idx="2">
-            <a:schemeClr val="accent1"/>
-          </a:effectRef>
-          <a:fontRef idx="minor">
-            <a:schemeClr val="lt1"/>
-          </a:fontRef>
-        </p:style>
-        <p:txBody>
-          <a:bodyPr rtlCol="0" anchor="ctr"/>
-          <a:lstStyle/>
-          <a:p/>
-        </p:txBody>
-      </p:sp>
-      <p:sp>
-        <p:nvSpPr>
-          <p:cNvPr id="22" name="TextBox 21"/>
-          <p:cNvSpPr txBox="1"/>
-          <p:nvPr/>
-        </p:nvSpPr>
-        <p:spPr>
-          <a:xfrm>
-            <a:off x="969264" y="5236464"/>
-            <a:ext cx="10234879" cy="312674"/>
+            <a:off x="969264" y="4736592"/>
+            <a:ext cx="10234879" cy="782320"/>
           </a:xfrm>
           <a:prstGeom prst="rect">
             <a:avLst/>
@@ -5314,13 +5142,13 @@
               </a:lnSpc>
             </a:pPr>
             <a:r>
-              <a:rPr sz="1400" b="0" i="0">
+              <a:rPr sz="2000" b="0" i="0">
                 <a:solidFill>
                   <a:srgbClr val="4B4F52"/>
                 </a:solidFill>
                 <a:latin typeface="Verdana"/>
               </a:rPr>
-              <a:t>Aucune ne demande de développement : trois interrupteurs sont déjà construits, celles-ci s'écrivent.</a:t>
+              <a:t>C'est une condition à la sortie, pas une frontière fermée. L'inventaire des flux existe justement pour alimenter cette évaluation.</a:t>
             </a:r>
           </a:p>
         </p:txBody>
@@ -5465,6 +5293,1194 @@
       </p:sp>
       <p:sp>
         <p:nvSpPr>
+          <p:cNvPr id="5" name="TextBox 4"/>
+          <p:cNvSpPr txBox="1"/>
+          <p:nvPr/>
+        </p:nvSpPr>
+        <p:spPr>
+          <a:xfrm>
+            <a:off x="566928" y="420624"/>
+            <a:ext cx="11057839" cy="237744"/>
+          </a:xfrm>
+          <a:prstGeom prst="rect">
+            <a:avLst/>
+          </a:prstGeom>
+          <a:noFill/>
+        </p:spPr>
+        <p:txBody>
+          <a:bodyPr wrap="square" lIns="0" rIns="0" tIns="0" bIns="0" anchor="t">
+            <a:spAutoFit/>
+          </a:bodyPr>
+          <a:lstStyle/>
+          <a:p>
+            <a:pPr algn="l">
+              <a:lnSpc>
+                <a:spcPct val="135000"/>
+              </a:lnSpc>
+            </a:pPr>
+            <a:r>
+              <a:rPr sz="1300" b="1" i="0" spc="156">
+                <a:solidFill>
+                  <a:srgbClr val="B45309"/>
+                </a:solidFill>
+                <a:latin typeface="Verdana"/>
+              </a:rPr>
+              <a:t>CE QUE LE CENTRE DÉCIDE</a:t>
+            </a:r>
+          </a:p>
+        </p:txBody>
+      </p:sp>
+      <p:sp>
+        <p:nvSpPr>
+          <p:cNvPr id="6" name="TextBox 5"/>
+          <p:cNvSpPr txBox="1"/>
+          <p:nvPr/>
+        </p:nvSpPr>
+        <p:spPr>
+          <a:xfrm>
+            <a:off x="566928" y="749808"/>
+            <a:ext cx="11057839" cy="877824"/>
+          </a:xfrm>
+          <a:prstGeom prst="rect">
+            <a:avLst/>
+          </a:prstGeom>
+          <a:noFill/>
+        </p:spPr>
+        <p:txBody>
+          <a:bodyPr wrap="square" lIns="0" rIns="0" tIns="0" bIns="0" anchor="t">
+            <a:spAutoFit/>
+          </a:bodyPr>
+          <a:lstStyle/>
+          <a:p>
+            <a:pPr algn="l">
+              <a:lnSpc>
+                <a:spcPct val="115000"/>
+              </a:lnSpc>
+            </a:pPr>
+            <a:r>
+              <a:rPr sz="3400" b="1" i="0">
+                <a:solidFill>
+                  <a:srgbClr val="17181A"/>
+                </a:solidFill>
+                <a:latin typeface="Verdana"/>
+              </a:rPr>
+              <a:t>Quatre décisions qui ne sont pas techniques</a:t>
+            </a:r>
+          </a:p>
+        </p:txBody>
+      </p:sp>
+      <p:sp>
+        <p:nvSpPr>
+          <p:cNvPr id="7" name="Rounded Rectangle 6"/>
+          <p:cNvSpPr/>
+          <p:nvPr/>
+        </p:nvSpPr>
+        <p:spPr>
+          <a:xfrm>
+            <a:off x="566928" y="1810512"/>
+            <a:ext cx="11057839" cy="2932176"/>
+          </a:xfrm>
+          <a:prstGeom prst="roundRect">
+            <a:avLst>
+              <a:gd name="adj" fmla="val 4989"/>
+            </a:avLst>
+          </a:prstGeom>
+          <a:solidFill>
+            <a:srgbClr val="FFFFFF"/>
+          </a:solidFill>
+          <a:ln w="12700">
+            <a:solidFill>
+              <a:srgbClr val="EAEAE8"/>
+            </a:solidFill>
+          </a:ln>
+          <a:effectLst/>
+        </p:spPr>
+        <p:style>
+          <a:lnRef idx="1">
+            <a:schemeClr val="accent1"/>
+          </a:lnRef>
+          <a:fillRef idx="3">
+            <a:schemeClr val="accent1"/>
+          </a:fillRef>
+          <a:effectRef idx="2">
+            <a:schemeClr val="accent1"/>
+          </a:effectRef>
+          <a:fontRef idx="minor">
+            <a:schemeClr val="lt1"/>
+          </a:fontRef>
+        </p:style>
+        <p:txBody>
+          <a:bodyPr rtlCol="0" anchor="ctr"/>
+          <a:lstStyle/>
+          <a:p/>
+        </p:txBody>
+      </p:sp>
+      <p:sp>
+        <p:nvSpPr>
+          <p:cNvPr id="8" name="TextBox 7"/>
+          <p:cNvSpPr txBox="1"/>
+          <p:nvPr/>
+        </p:nvSpPr>
+        <p:spPr>
+          <a:xfrm>
+            <a:off x="932688" y="1975104"/>
+            <a:ext cx="3291492" cy="237744"/>
+          </a:xfrm>
+          <a:prstGeom prst="rect">
+            <a:avLst/>
+          </a:prstGeom>
+          <a:noFill/>
+        </p:spPr>
+        <p:txBody>
+          <a:bodyPr wrap="square" lIns="0" rIns="0" tIns="0" bIns="0" anchor="t">
+            <a:spAutoFit/>
+          </a:bodyPr>
+          <a:lstStyle/>
+          <a:p>
+            <a:pPr algn="l">
+              <a:lnSpc>
+                <a:spcPct val="135000"/>
+              </a:lnSpc>
+            </a:pPr>
+            <a:r>
+              <a:rPr sz="1300" b="1" i="0" spc="156">
+                <a:solidFill>
+                  <a:srgbClr val="6E7175"/>
+                </a:solidFill>
+                <a:latin typeface="Verdana"/>
+              </a:rPr>
+              <a:t>LA DÉCISION</a:t>
+            </a:r>
+          </a:p>
+        </p:txBody>
+      </p:sp>
+      <p:sp>
+        <p:nvSpPr>
+          <p:cNvPr id="9" name="TextBox 8"/>
+          <p:cNvSpPr txBox="1"/>
+          <p:nvPr/>
+        </p:nvSpPr>
+        <p:spPr>
+          <a:xfrm>
+            <a:off x="4443636" y="1975104"/>
+            <a:ext cx="6595914" cy="237744"/>
+          </a:xfrm>
+          <a:prstGeom prst="rect">
+            <a:avLst/>
+          </a:prstGeom>
+          <a:noFill/>
+        </p:spPr>
+        <p:txBody>
+          <a:bodyPr wrap="square" lIns="0" rIns="0" tIns="0" bIns="0" anchor="t">
+            <a:spAutoFit/>
+          </a:bodyPr>
+          <a:lstStyle/>
+          <a:p>
+            <a:pPr algn="l">
+              <a:lnSpc>
+                <a:spcPct val="135000"/>
+              </a:lnSpc>
+            </a:pPr>
+            <a:r>
+              <a:rPr sz="1300" b="1" i="0" spc="156">
+                <a:solidFill>
+                  <a:srgbClr val="6E7175"/>
+                </a:solidFill>
+                <a:latin typeface="Verdana"/>
+              </a:rPr>
+              <a:t>CE QU'ELLE DEMANDE</a:t>
+            </a:r>
+          </a:p>
+        </p:txBody>
+      </p:sp>
+      <p:sp>
+        <p:nvSpPr>
+          <p:cNvPr id="10" name="TextBox 9"/>
+          <p:cNvSpPr txBox="1"/>
+          <p:nvPr/>
+        </p:nvSpPr>
+        <p:spPr>
+          <a:xfrm>
+            <a:off x="932688" y="2395728"/>
+            <a:ext cx="3291492" cy="573024"/>
+          </a:xfrm>
+          <a:prstGeom prst="rect">
+            <a:avLst/>
+          </a:prstGeom>
+          <a:noFill/>
+        </p:spPr>
+        <p:txBody>
+          <a:bodyPr wrap="square" lIns="0" rIns="0" tIns="0" bIns="0" anchor="t">
+            <a:spAutoFit/>
+          </a:bodyPr>
+          <a:lstStyle/>
+          <a:p>
+            <a:pPr algn="l">
+              <a:lnSpc>
+                <a:spcPct val="132000"/>
+              </a:lnSpc>
+            </a:pPr>
+            <a:r>
+              <a:rPr sz="1600" b="0" i="0">
+                <a:solidFill>
+                  <a:srgbClr val="3A3D40"/>
+                </a:solidFill>
+                <a:latin typeface="Verdana"/>
+              </a:rPr>
+              <a:t>La durée de conservation</a:t>
+            </a:r>
+          </a:p>
+        </p:txBody>
+      </p:sp>
+      <p:sp>
+        <p:nvSpPr>
+          <p:cNvPr id="11" name="TextBox 10"/>
+          <p:cNvSpPr txBox="1"/>
+          <p:nvPr/>
+        </p:nvSpPr>
+        <p:spPr>
+          <a:xfrm>
+            <a:off x="4443636" y="2395728"/>
+            <a:ext cx="6595914" cy="573024"/>
+          </a:xfrm>
+          <a:prstGeom prst="rect">
+            <a:avLst/>
+          </a:prstGeom>
+          <a:noFill/>
+        </p:spPr>
+        <p:txBody>
+          <a:bodyPr wrap="square" lIns="0" rIns="0" tIns="0" bIns="0" anchor="t">
+            <a:spAutoFit/>
+          </a:bodyPr>
+          <a:lstStyle/>
+          <a:p>
+            <a:pPr algn="l">
+              <a:lnSpc>
+                <a:spcPct val="132000"/>
+              </a:lnSpc>
+            </a:pPr>
+            <a:r>
+              <a:rPr sz="1600" b="0" i="0">
+                <a:solidFill>
+                  <a:srgbClr val="3A3D40"/>
+                </a:solidFill>
+                <a:latin typeface="Verdana"/>
+              </a:rPr>
+              <a:t>combien de temps on garde les traces d'un élève après son départ</a:t>
+            </a:r>
+          </a:p>
+        </p:txBody>
+      </p:sp>
+      <p:sp>
+        <p:nvSpPr>
+          <p:cNvPr id="12" name="Rectangle 11"/>
+          <p:cNvSpPr/>
+          <p:nvPr/>
+        </p:nvSpPr>
+        <p:spPr>
+          <a:xfrm>
+            <a:off x="932688" y="3041904"/>
+            <a:ext cx="10326319" cy="10058"/>
+          </a:xfrm>
+          <a:prstGeom prst="rect">
+            <a:avLst/>
+          </a:prstGeom>
+          <a:solidFill>
+            <a:srgbClr val="EAEAE8"/>
+          </a:solidFill>
+          <a:ln>
+            <a:noFill/>
+          </a:ln>
+          <a:effectLst/>
+        </p:spPr>
+        <p:style>
+          <a:lnRef idx="1">
+            <a:schemeClr val="accent1"/>
+          </a:lnRef>
+          <a:fillRef idx="3">
+            <a:schemeClr val="accent1"/>
+          </a:fillRef>
+          <a:effectRef idx="2">
+            <a:schemeClr val="accent1"/>
+          </a:effectRef>
+          <a:fontRef idx="minor">
+            <a:schemeClr val="lt1"/>
+          </a:fontRef>
+        </p:style>
+        <p:txBody>
+          <a:bodyPr rtlCol="0" anchor="ctr"/>
+          <a:lstStyle/>
+          <a:p/>
+        </p:txBody>
+      </p:sp>
+      <p:sp>
+        <p:nvSpPr>
+          <p:cNvPr id="13" name="TextBox 12"/>
+          <p:cNvSpPr txBox="1"/>
+          <p:nvPr/>
+        </p:nvSpPr>
+        <p:spPr>
+          <a:xfrm>
+            <a:off x="932688" y="3169920"/>
+            <a:ext cx="3291492" cy="304800"/>
+          </a:xfrm>
+          <a:prstGeom prst="rect">
+            <a:avLst/>
+          </a:prstGeom>
+          <a:noFill/>
+        </p:spPr>
+        <p:txBody>
+          <a:bodyPr wrap="square" lIns="0" rIns="0" tIns="0" bIns="0" anchor="t">
+            <a:spAutoFit/>
+          </a:bodyPr>
+          <a:lstStyle/>
+          <a:p>
+            <a:pPr algn="l">
+              <a:lnSpc>
+                <a:spcPct val="132000"/>
+              </a:lnSpc>
+            </a:pPr>
+            <a:r>
+              <a:rPr sz="1600" b="0" i="0">
+                <a:solidFill>
+                  <a:srgbClr val="3A3D40"/>
+                </a:solidFill>
+                <a:latin typeface="Verdana"/>
+              </a:rPr>
+              <a:t>La communication hors Québec</a:t>
+            </a:r>
+          </a:p>
+        </p:txBody>
+      </p:sp>
+      <p:sp>
+        <p:nvSpPr>
+          <p:cNvPr id="14" name="TextBox 13"/>
+          <p:cNvSpPr txBox="1"/>
+          <p:nvPr/>
+        </p:nvSpPr>
+        <p:spPr>
+          <a:xfrm>
+            <a:off x="4443636" y="3169920"/>
+            <a:ext cx="6595914" cy="304800"/>
+          </a:xfrm>
+          <a:prstGeom prst="rect">
+            <a:avLst/>
+          </a:prstGeom>
+          <a:noFill/>
+        </p:spPr>
+        <p:txBody>
+          <a:bodyPr wrap="square" lIns="0" rIns="0" tIns="0" bIns="0" anchor="t">
+            <a:spAutoFit/>
+          </a:bodyPr>
+          <a:lstStyle/>
+          <a:p>
+            <a:pPr algn="l">
+              <a:lnSpc>
+                <a:spcPct val="132000"/>
+              </a:lnSpc>
+            </a:pPr>
+            <a:r>
+              <a:rPr sz="1600" b="0" i="0">
+                <a:solidFill>
+                  <a:srgbClr val="3A3D40"/>
+                </a:solidFill>
+                <a:latin typeface="Verdana"/>
+              </a:rPr>
+              <a:t>l'évaluation, la conclusion, l'entente</a:t>
+            </a:r>
+          </a:p>
+        </p:txBody>
+      </p:sp>
+      <p:sp>
+        <p:nvSpPr>
+          <p:cNvPr id="15" name="Rectangle 14"/>
+          <p:cNvSpPr/>
+          <p:nvPr/>
+        </p:nvSpPr>
+        <p:spPr>
+          <a:xfrm>
+            <a:off x="932688" y="3547872"/>
+            <a:ext cx="10326319" cy="10058"/>
+          </a:xfrm>
+          <a:prstGeom prst="rect">
+            <a:avLst/>
+          </a:prstGeom>
+          <a:solidFill>
+            <a:srgbClr val="EAEAE8"/>
+          </a:solidFill>
+          <a:ln>
+            <a:noFill/>
+          </a:ln>
+          <a:effectLst/>
+        </p:spPr>
+        <p:style>
+          <a:lnRef idx="1">
+            <a:schemeClr val="accent1"/>
+          </a:lnRef>
+          <a:fillRef idx="3">
+            <a:schemeClr val="accent1"/>
+          </a:fillRef>
+          <a:effectRef idx="2">
+            <a:schemeClr val="accent1"/>
+          </a:effectRef>
+          <a:fontRef idx="minor">
+            <a:schemeClr val="lt1"/>
+          </a:fontRef>
+        </p:style>
+        <p:txBody>
+          <a:bodyPr rtlCol="0" anchor="ctr"/>
+          <a:lstStyle/>
+          <a:p/>
+        </p:txBody>
+      </p:sp>
+      <p:sp>
+        <p:nvSpPr>
+          <p:cNvPr id="16" name="TextBox 15"/>
+          <p:cNvSpPr txBox="1"/>
+          <p:nvPr/>
+        </p:nvSpPr>
+        <p:spPr>
+          <a:xfrm>
+            <a:off x="932688" y="3675887"/>
+            <a:ext cx="3291492" cy="304800"/>
+          </a:xfrm>
+          <a:prstGeom prst="rect">
+            <a:avLst/>
+          </a:prstGeom>
+          <a:noFill/>
+        </p:spPr>
+        <p:txBody>
+          <a:bodyPr wrap="square" lIns="0" rIns="0" tIns="0" bIns="0" anchor="t">
+            <a:spAutoFit/>
+          </a:bodyPr>
+          <a:lstStyle/>
+          <a:p>
+            <a:pPr algn="l">
+              <a:lnSpc>
+                <a:spcPct val="132000"/>
+              </a:lnSpc>
+            </a:pPr>
+            <a:r>
+              <a:rPr sz="1600" b="0" i="0">
+                <a:solidFill>
+                  <a:srgbClr val="3A3D40"/>
+                </a:solidFill>
+                <a:latin typeface="Verdana"/>
+              </a:rPr>
+              <a:t>Qui a accès</a:t>
+            </a:r>
+          </a:p>
+        </p:txBody>
+      </p:sp>
+      <p:sp>
+        <p:nvSpPr>
+          <p:cNvPr id="17" name="TextBox 16"/>
+          <p:cNvSpPr txBox="1"/>
+          <p:nvPr/>
+        </p:nvSpPr>
+        <p:spPr>
+          <a:xfrm>
+            <a:off x="4443636" y="3675887"/>
+            <a:ext cx="6595914" cy="304800"/>
+          </a:xfrm>
+          <a:prstGeom prst="rect">
+            <a:avLst/>
+          </a:prstGeom>
+          <a:noFill/>
+        </p:spPr>
+        <p:txBody>
+          <a:bodyPr wrap="square" lIns="0" rIns="0" tIns="0" bIns="0" anchor="t">
+            <a:spAutoFit/>
+          </a:bodyPr>
+          <a:lstStyle/>
+          <a:p>
+            <a:pPr algn="l">
+              <a:lnSpc>
+                <a:spcPct val="132000"/>
+              </a:lnSpc>
+            </a:pPr>
+            <a:r>
+              <a:rPr sz="1600" b="0" i="0">
+                <a:solidFill>
+                  <a:srgbClr val="3A3D40"/>
+                </a:solidFill>
+                <a:latin typeface="Verdana"/>
+              </a:rPr>
+              <a:t>les comptes de direction, et ce qu'ils voient</a:t>
+            </a:r>
+          </a:p>
+        </p:txBody>
+      </p:sp>
+      <p:sp>
+        <p:nvSpPr>
+          <p:cNvPr id="18" name="Rectangle 17"/>
+          <p:cNvSpPr/>
+          <p:nvPr/>
+        </p:nvSpPr>
+        <p:spPr>
+          <a:xfrm>
+            <a:off x="932688" y="4053840"/>
+            <a:ext cx="10326319" cy="10058"/>
+          </a:xfrm>
+          <a:prstGeom prst="rect">
+            <a:avLst/>
+          </a:prstGeom>
+          <a:solidFill>
+            <a:srgbClr val="EAEAE8"/>
+          </a:solidFill>
+          <a:ln>
+            <a:noFill/>
+          </a:ln>
+          <a:effectLst/>
+        </p:spPr>
+        <p:style>
+          <a:lnRef idx="1">
+            <a:schemeClr val="accent1"/>
+          </a:lnRef>
+          <a:fillRef idx="3">
+            <a:schemeClr val="accent1"/>
+          </a:fillRef>
+          <a:effectRef idx="2">
+            <a:schemeClr val="accent1"/>
+          </a:effectRef>
+          <a:fontRef idx="minor">
+            <a:schemeClr val="lt1"/>
+          </a:fontRef>
+        </p:style>
+        <p:txBody>
+          <a:bodyPr rtlCol="0" anchor="ctr"/>
+          <a:lstStyle/>
+          <a:p/>
+        </p:txBody>
+      </p:sp>
+      <p:sp>
+        <p:nvSpPr>
+          <p:cNvPr id="19" name="TextBox 18"/>
+          <p:cNvSpPr txBox="1"/>
+          <p:nvPr/>
+        </p:nvSpPr>
+        <p:spPr>
+          <a:xfrm>
+            <a:off x="932688" y="4181856"/>
+            <a:ext cx="3291492" cy="304800"/>
+          </a:xfrm>
+          <a:prstGeom prst="rect">
+            <a:avLst/>
+          </a:prstGeom>
+          <a:noFill/>
+        </p:spPr>
+        <p:txBody>
+          <a:bodyPr wrap="square" lIns="0" rIns="0" tIns="0" bIns="0" anchor="t">
+            <a:spAutoFit/>
+          </a:bodyPr>
+          <a:lstStyle/>
+          <a:p>
+            <a:pPr algn="l">
+              <a:lnSpc>
+                <a:spcPct val="132000"/>
+              </a:lnSpc>
+            </a:pPr>
+            <a:r>
+              <a:rPr sz="1600" b="0" i="0">
+                <a:solidFill>
+                  <a:srgbClr val="3A3D40"/>
+                </a:solidFill>
+                <a:latin typeface="Verdana"/>
+              </a:rPr>
+              <a:t>Le responsable</a:t>
+            </a:r>
+          </a:p>
+        </p:txBody>
+      </p:sp>
+      <p:sp>
+        <p:nvSpPr>
+          <p:cNvPr id="20" name="TextBox 19"/>
+          <p:cNvSpPr txBox="1"/>
+          <p:nvPr/>
+        </p:nvSpPr>
+        <p:spPr>
+          <a:xfrm>
+            <a:off x="4443636" y="4181856"/>
+            <a:ext cx="6595914" cy="304800"/>
+          </a:xfrm>
+          <a:prstGeom prst="rect">
+            <a:avLst/>
+          </a:prstGeom>
+          <a:noFill/>
+        </p:spPr>
+        <p:txBody>
+          <a:bodyPr wrap="square" lIns="0" rIns="0" tIns="0" bIns="0" anchor="t">
+            <a:spAutoFit/>
+          </a:bodyPr>
+          <a:lstStyle/>
+          <a:p>
+            <a:pPr algn="l">
+              <a:lnSpc>
+                <a:spcPct val="132000"/>
+              </a:lnSpc>
+            </a:pPr>
+            <a:r>
+              <a:rPr sz="1600" b="0" i="0">
+                <a:solidFill>
+                  <a:srgbClr val="3A3D40"/>
+                </a:solidFill>
+                <a:latin typeface="Verdana"/>
+              </a:rPr>
+              <a:t>la personne qui répond d'une demande d'accès</a:t>
+            </a:r>
+          </a:p>
+        </p:txBody>
+      </p:sp>
+      <p:sp>
+        <p:nvSpPr>
+          <p:cNvPr id="21" name="Rounded Rectangle 20"/>
+          <p:cNvSpPr/>
+          <p:nvPr/>
+        </p:nvSpPr>
+        <p:spPr>
+          <a:xfrm>
+            <a:off x="566928" y="4980432"/>
+            <a:ext cx="11057839" cy="769874"/>
+          </a:xfrm>
+          <a:prstGeom prst="roundRect">
+            <a:avLst>
+              <a:gd name="adj" fmla="val 19003"/>
+            </a:avLst>
+          </a:prstGeom>
+          <a:solidFill>
+            <a:srgbClr val="FBFBFA"/>
+          </a:solidFill>
+          <a:ln w="12700">
+            <a:solidFill>
+              <a:srgbClr val="EAEAE8"/>
+            </a:solidFill>
+          </a:ln>
+          <a:effectLst/>
+        </p:spPr>
+        <p:style>
+          <a:lnRef idx="1">
+            <a:schemeClr val="accent1"/>
+          </a:lnRef>
+          <a:fillRef idx="3">
+            <a:schemeClr val="accent1"/>
+          </a:fillRef>
+          <a:effectRef idx="2">
+            <a:schemeClr val="accent1"/>
+          </a:effectRef>
+          <a:fontRef idx="minor">
+            <a:schemeClr val="lt1"/>
+          </a:fontRef>
+        </p:style>
+        <p:txBody>
+          <a:bodyPr rtlCol="0" anchor="ctr"/>
+          <a:lstStyle/>
+          <a:p/>
+        </p:txBody>
+      </p:sp>
+      <p:sp>
+        <p:nvSpPr>
+          <p:cNvPr id="22" name="TextBox 21"/>
+          <p:cNvSpPr txBox="1"/>
+          <p:nvPr/>
+        </p:nvSpPr>
+        <p:spPr>
+          <a:xfrm>
+            <a:off x="969264" y="5236464"/>
+            <a:ext cx="10234879" cy="312674"/>
+          </a:xfrm>
+          <a:prstGeom prst="rect">
+            <a:avLst/>
+          </a:prstGeom>
+          <a:noFill/>
+        </p:spPr>
+        <p:txBody>
+          <a:bodyPr wrap="square" lIns="0" rIns="0" tIns="0" bIns="0" anchor="t">
+            <a:spAutoFit/>
+          </a:bodyPr>
+          <a:lstStyle/>
+          <a:p>
+            <a:pPr algn="l">
+              <a:lnSpc>
+                <a:spcPct val="145000"/>
+              </a:lnSpc>
+            </a:pPr>
+            <a:r>
+              <a:rPr sz="1400" b="0" i="0">
+                <a:solidFill>
+                  <a:srgbClr val="4B4F52"/>
+                </a:solidFill>
+                <a:latin typeface="Verdana"/>
+              </a:rPr>
+              <a:t>Aucune ne demande de développement : trois interrupteurs sont déjà construits, celles-ci s'écrivent.</a:t>
+            </a:r>
+          </a:p>
+        </p:txBody>
+      </p:sp>
+    </p:spTree>
+  </p:cSld>
+  <p:clrMapOvr>
+    <a:masterClrMapping/>
+  </p:clrMapOvr>
+</p:sld>
+</file>
+
+<file path=ppt/slides/slide12.xml><?xml version="1.0" encoding="utf-8"?>
+<p:sld xmlns:a="http://schemas.openxmlformats.org/drawingml/2006/main" xmlns:p="http://schemas.openxmlformats.org/presentationml/2006/main" xmlns:r="http://schemas.openxmlformats.org/officeDocument/2006/relationships">
+  <p:cSld>
+    <p:spTree>
+      <p:nvGrpSpPr>
+        <p:cNvPr id="1" name=""/>
+        <p:cNvGrpSpPr/>
+        <p:nvPr/>
+      </p:nvGrpSpPr>
+      <p:grpSpPr/>
+      <p:sp>
+        <p:nvSpPr>
+          <p:cNvPr id="2" name="Rectangle 1"/>
+          <p:cNvSpPr/>
+          <p:nvPr/>
+        </p:nvSpPr>
+        <p:spPr>
+          <a:xfrm>
+            <a:off x="0" y="0"/>
+            <a:ext cx="12191695" cy="6858000"/>
+          </a:xfrm>
+          <a:prstGeom prst="rect">
+            <a:avLst/>
+          </a:prstGeom>
+          <a:solidFill>
+            <a:srgbClr val="F7F7F5"/>
+          </a:solidFill>
+          <a:ln>
+            <a:noFill/>
+          </a:ln>
+          <a:effectLst/>
+        </p:spPr>
+        <p:style>
+          <a:lnRef idx="1">
+            <a:schemeClr val="accent1"/>
+          </a:lnRef>
+          <a:fillRef idx="3">
+            <a:schemeClr val="accent1"/>
+          </a:fillRef>
+          <a:effectRef idx="2">
+            <a:schemeClr val="accent1"/>
+          </a:effectRef>
+          <a:fontRef idx="minor">
+            <a:schemeClr val="lt1"/>
+          </a:fontRef>
+        </p:style>
+        <p:txBody>
+          <a:bodyPr rtlCol="0" anchor="ctr"/>
+          <a:lstStyle/>
+          <a:p/>
+        </p:txBody>
+      </p:sp>
+      <p:sp>
+        <p:nvSpPr>
+          <p:cNvPr id="3" name="TextBox 2"/>
+          <p:cNvSpPr txBox="1"/>
+          <p:nvPr/>
+        </p:nvSpPr>
+        <p:spPr>
+          <a:xfrm>
+            <a:off x="566928" y="6355080"/>
+            <a:ext cx="6400800" cy="219456"/>
+          </a:xfrm>
+          <a:prstGeom prst="rect">
+            <a:avLst/>
+          </a:prstGeom>
+          <a:noFill/>
+        </p:spPr>
+        <p:txBody>
+          <a:bodyPr wrap="square" lIns="0" rIns="0" tIns="0" bIns="0" anchor="t">
+            <a:spAutoFit/>
+          </a:bodyPr>
+          <a:lstStyle/>
+          <a:p>
+            <a:pPr algn="l">
+              <a:lnSpc>
+                <a:spcPct val="135000"/>
+              </a:lnSpc>
+            </a:pPr>
+            <a:r>
+              <a:rPr sz="1200" b="0" i="0">
+                <a:solidFill>
+                  <a:srgbClr val="6E7175"/>
+                </a:solidFill>
+                <a:latin typeface="Verdana"/>
+              </a:rPr>
+              <a:t>P3 · francis · présentation</a:t>
+            </a:r>
+          </a:p>
+        </p:txBody>
+      </p:sp>
+      <p:sp>
+        <p:nvSpPr>
+          <p:cNvPr id="4" name="TextBox 3"/>
+          <p:cNvSpPr txBox="1"/>
+          <p:nvPr/>
+        </p:nvSpPr>
+        <p:spPr>
+          <a:xfrm>
+            <a:off x="10710367" y="6355080"/>
+            <a:ext cx="914400" cy="219456"/>
+          </a:xfrm>
+          <a:prstGeom prst="rect">
+            <a:avLst/>
+          </a:prstGeom>
+          <a:noFill/>
+        </p:spPr>
+        <p:txBody>
+          <a:bodyPr wrap="square" lIns="0" rIns="0" tIns="0" bIns="0" anchor="t">
+            <a:spAutoFit/>
+          </a:bodyPr>
+          <a:lstStyle/>
+          <a:p>
+            <a:pPr algn="r">
+              <a:lnSpc>
+                <a:spcPct val="135000"/>
+              </a:lnSpc>
+            </a:pPr>
+            <a:r>
+              <a:rPr sz="1200" b="0" i="0">
+                <a:solidFill>
+                  <a:srgbClr val="6E7175"/>
+                </a:solidFill>
+                <a:latin typeface="Verdana"/>
+              </a:rPr>
+              <a:t>12</a:t>
+            </a:r>
+          </a:p>
+        </p:txBody>
+      </p:sp>
+      <p:sp>
+        <p:nvSpPr>
+          <p:cNvPr id="5" name="TextBox 4"/>
+          <p:cNvSpPr txBox="1"/>
+          <p:nvPr/>
+        </p:nvSpPr>
+        <p:spPr>
+          <a:xfrm>
+            <a:off x="566928" y="420624"/>
+            <a:ext cx="11057839" cy="237744"/>
+          </a:xfrm>
+          <a:prstGeom prst="rect">
+            <a:avLst/>
+          </a:prstGeom>
+          <a:noFill/>
+        </p:spPr>
+        <p:txBody>
+          <a:bodyPr wrap="square" lIns="0" rIns="0" tIns="0" bIns="0" anchor="t">
+            <a:spAutoFit/>
+          </a:bodyPr>
+          <a:lstStyle/>
+          <a:p>
+            <a:pPr algn="l">
+              <a:lnSpc>
+                <a:spcPct val="135000"/>
+              </a:lnSpc>
+            </a:pPr>
+            <a:r>
+              <a:rPr sz="1300" b="1" i="0" spc="156">
+                <a:solidFill>
+                  <a:srgbClr val="B45309"/>
+                </a:solidFill>
+                <a:latin typeface="Verdana"/>
+              </a:rPr>
+              <a:t>SANS RIEN COLLECTER</a:t>
+            </a:r>
+          </a:p>
+        </p:txBody>
+      </p:sp>
+      <p:sp>
+        <p:nvSpPr>
+          <p:cNvPr id="6" name="TextBox 5"/>
+          <p:cNvSpPr txBox="1"/>
+          <p:nvPr/>
+        </p:nvSpPr>
+        <p:spPr>
+          <a:xfrm>
+            <a:off x="566928" y="749808"/>
+            <a:ext cx="11057839" cy="877824"/>
+          </a:xfrm>
+          <a:prstGeom prst="rect">
+            <a:avLst/>
+          </a:prstGeom>
+          <a:noFill/>
+        </p:spPr>
+        <p:txBody>
+          <a:bodyPr wrap="square" lIns="0" rIns="0" tIns="0" bIns="0" anchor="t">
+            <a:spAutoFit/>
+          </a:bodyPr>
+          <a:lstStyle/>
+          <a:p>
+            <a:pPr algn="l">
+              <a:lnSpc>
+                <a:spcPct val="115000"/>
+              </a:lnSpc>
+            </a:pPr>
+            <a:r>
+              <a:rPr sz="3400" b="1" i="0">
+                <a:solidFill>
+                  <a:srgbClr val="17181A"/>
+                </a:solidFill>
+                <a:latin typeface="Verdana"/>
+              </a:rPr>
+              <a:t>Une classe entière, sans un compte</a:t>
+            </a:r>
+          </a:p>
+        </p:txBody>
+      </p:sp>
+      <p:sp>
+        <p:nvSpPr>
+          <p:cNvPr id="7" name="TextBox 6"/>
+          <p:cNvSpPr txBox="1"/>
+          <p:nvPr/>
+        </p:nvSpPr>
+        <p:spPr>
+          <a:xfrm>
+            <a:off x="566928" y="1645920"/>
+            <a:ext cx="11057839" cy="617220"/>
+          </a:xfrm>
+          <a:prstGeom prst="rect">
+            <a:avLst/>
+          </a:prstGeom>
+          <a:noFill/>
+        </p:spPr>
+        <p:txBody>
+          <a:bodyPr wrap="square" lIns="0" rIns="0" tIns="0" bIns="0" anchor="t">
+            <a:spAutoFit/>
+          </a:bodyPr>
+          <a:lstStyle/>
+          <a:p>
+            <a:pPr algn="l">
+              <a:lnSpc>
+                <a:spcPct val="135000"/>
+              </a:lnSpc>
+            </a:pPr>
+            <a:r>
+              <a:rPr sz="1800" b="0" i="0">
+                <a:solidFill>
+                  <a:srgbClr val="6E7175"/>
+                </a:solidFill>
+                <a:latin typeface="Verdana"/>
+              </a:rPr>
+              <a:t>Le suivi de l'enseignant est le même écran. Les élèves s'appellent « Participant 3 » : il n'existe aucune donnée pour les nommer.</a:t>
+            </a:r>
+          </a:p>
+        </p:txBody>
+      </p:sp>
+      <p:sp>
+        <p:nvSpPr>
+          <p:cNvPr id="8" name="Rounded Rectangle 7"/>
+          <p:cNvSpPr/>
+          <p:nvPr/>
+        </p:nvSpPr>
+        <p:spPr>
+          <a:xfrm>
+            <a:off x="4691611" y="2372868"/>
+            <a:ext cx="2808472" cy="3799332"/>
+          </a:xfrm>
+          <a:prstGeom prst="roundRect">
+            <a:avLst>
+              <a:gd name="adj" fmla="val 3255"/>
+            </a:avLst>
+          </a:prstGeom>
+          <a:solidFill>
+            <a:srgbClr val="FFFFFF"/>
+          </a:solidFill>
+          <a:ln w="12700">
+            <a:solidFill>
+              <a:srgbClr val="D6D6D2"/>
+            </a:solidFill>
+          </a:ln>
+          <a:effectLst/>
+        </p:spPr>
+        <p:style>
+          <a:lnRef idx="1">
+            <a:schemeClr val="accent1"/>
+          </a:lnRef>
+          <a:fillRef idx="3">
+            <a:schemeClr val="accent1"/>
+          </a:fillRef>
+          <a:effectRef idx="2">
+            <a:schemeClr val="accent1"/>
+          </a:effectRef>
+          <a:fontRef idx="minor">
+            <a:schemeClr val="lt1"/>
+          </a:fontRef>
+        </p:style>
+        <p:txBody>
+          <a:bodyPr rtlCol="0" anchor="ctr"/>
+          <a:lstStyle/>
+          <a:p/>
+        </p:txBody>
+      </p:sp>
+      <p:pic>
+        <p:nvPicPr>
+          <p:cNvPr id="9" name="Picture 8" descr="cas-04-suivi-seance.png"/>
+          <p:cNvPicPr>
+            <a:picLocks noChangeAspect="1"/>
+          </p:cNvPicPr>
+          <p:nvPr/>
+        </p:nvPicPr>
+        <p:blipFill>
+          <a:blip r:embed="rId2"/>
+          <a:stretch>
+            <a:fillRect/>
+          </a:stretch>
+        </p:blipFill>
+        <p:spPr>
+          <a:xfrm>
+            <a:off x="4709899" y="2391156"/>
+            <a:ext cx="2771896" cy="3762756"/>
+          </a:xfrm>
+          <a:prstGeom prst="rect">
+            <a:avLst/>
+          </a:prstGeom>
+        </p:spPr>
+      </p:pic>
+    </p:spTree>
+  </p:cSld>
+  <p:clrMapOvr>
+    <a:masterClrMapping/>
+  </p:clrMapOvr>
+</p:sld>
+</file>
+
+<file path=ppt/slides/slide13.xml><?xml version="1.0" encoding="utf-8"?>
+<p:sld xmlns:a="http://schemas.openxmlformats.org/drawingml/2006/main" xmlns:p="http://schemas.openxmlformats.org/presentationml/2006/main" xmlns:r="http://schemas.openxmlformats.org/officeDocument/2006/relationships">
+  <p:cSld>
+    <p:spTree>
+      <p:nvGrpSpPr>
+        <p:cNvPr id="1" name=""/>
+        <p:cNvGrpSpPr/>
+        <p:nvPr/>
+      </p:nvGrpSpPr>
+      <p:grpSpPr/>
+      <p:sp>
+        <p:nvSpPr>
+          <p:cNvPr id="2" name="Rectangle 1"/>
+          <p:cNvSpPr/>
+          <p:nvPr/>
+        </p:nvSpPr>
+        <p:spPr>
+          <a:xfrm>
+            <a:off x="0" y="0"/>
+            <a:ext cx="12191695" cy="6858000"/>
+          </a:xfrm>
+          <a:prstGeom prst="rect">
+            <a:avLst/>
+          </a:prstGeom>
+          <a:solidFill>
+            <a:srgbClr val="F7F7F5"/>
+          </a:solidFill>
+          <a:ln>
+            <a:noFill/>
+          </a:ln>
+          <a:effectLst/>
+        </p:spPr>
+        <p:style>
+          <a:lnRef idx="1">
+            <a:schemeClr val="accent1"/>
+          </a:lnRef>
+          <a:fillRef idx="3">
+            <a:schemeClr val="accent1"/>
+          </a:fillRef>
+          <a:effectRef idx="2">
+            <a:schemeClr val="accent1"/>
+          </a:effectRef>
+          <a:fontRef idx="minor">
+            <a:schemeClr val="lt1"/>
+          </a:fontRef>
+        </p:style>
+        <p:txBody>
+          <a:bodyPr rtlCol="0" anchor="ctr"/>
+          <a:lstStyle/>
+          <a:p/>
+        </p:txBody>
+      </p:sp>
+      <p:sp>
+        <p:nvSpPr>
+          <p:cNvPr id="3" name="TextBox 2"/>
+          <p:cNvSpPr txBox="1"/>
+          <p:nvPr/>
+        </p:nvSpPr>
+        <p:spPr>
+          <a:xfrm>
+            <a:off x="566928" y="6355080"/>
+            <a:ext cx="6400800" cy="219456"/>
+          </a:xfrm>
+          <a:prstGeom prst="rect">
+            <a:avLst/>
+          </a:prstGeom>
+          <a:noFill/>
+        </p:spPr>
+        <p:txBody>
+          <a:bodyPr wrap="square" lIns="0" rIns="0" tIns="0" bIns="0" anchor="t">
+            <a:spAutoFit/>
+          </a:bodyPr>
+          <a:lstStyle/>
+          <a:p>
+            <a:pPr algn="l">
+              <a:lnSpc>
+                <a:spcPct val="135000"/>
+              </a:lnSpc>
+            </a:pPr>
+            <a:r>
+              <a:rPr sz="1200" b="0" i="0">
+                <a:solidFill>
+                  <a:srgbClr val="6E7175"/>
+                </a:solidFill>
+                <a:latin typeface="Verdana"/>
+              </a:rPr>
+              <a:t>P3 · francis · présentation</a:t>
+            </a:r>
+          </a:p>
+        </p:txBody>
+      </p:sp>
+      <p:sp>
+        <p:nvSpPr>
+          <p:cNvPr id="4" name="TextBox 3"/>
+          <p:cNvSpPr txBox="1"/>
+          <p:nvPr/>
+        </p:nvSpPr>
+        <p:spPr>
+          <a:xfrm>
+            <a:off x="10710367" y="6355080"/>
+            <a:ext cx="914400" cy="219456"/>
+          </a:xfrm>
+          <a:prstGeom prst="rect">
+            <a:avLst/>
+          </a:prstGeom>
+          <a:noFill/>
+        </p:spPr>
+        <p:txBody>
+          <a:bodyPr wrap="square" lIns="0" rIns="0" tIns="0" bIns="0" anchor="t">
+            <a:spAutoFit/>
+          </a:bodyPr>
+          <a:lstStyle/>
+          <a:p>
+            <a:pPr algn="r">
+              <a:lnSpc>
+                <a:spcPct val="135000"/>
+              </a:lnSpc>
+            </a:pPr>
+            <a:r>
+              <a:rPr sz="1200" b="0" i="0">
+                <a:solidFill>
+                  <a:srgbClr val="6E7175"/>
+                </a:solidFill>
+                <a:latin typeface="Verdana"/>
+              </a:rPr>
+              <a:t>13</a:t>
+            </a:r>
+          </a:p>
+        </p:txBody>
+      </p:sp>
+      <p:sp>
+        <p:nvSpPr>
           <p:cNvPr id="5" name="Rectangle 4"/>
           <p:cNvSpPr/>
           <p:nvPr/>
@@ -10015,33 +11031,111 @@
                 </a:solidFill>
                 <a:latin typeface="Verdana"/>
               </a:rPr>
-              <a:t>LA RÈGLE DE L'ARTICLE 70.1</a:t>
-            </a:r>
-          </a:p>
-        </p:txBody>
-      </p:sp>
-      <p:sp>
-        <p:nvSpPr>
-          <p:cNvPr id="6" name="Rounded Rectangle 5"/>
+              <a:t>CE QUE LA DIRECTION VOIT</a:t>
+            </a:r>
+          </a:p>
+        </p:txBody>
+      </p:sp>
+      <p:sp>
+        <p:nvSpPr>
+          <p:cNvPr id="6" name="TextBox 5"/>
+          <p:cNvSpPr txBox="1"/>
+          <p:nvPr/>
+        </p:nvSpPr>
+        <p:spPr>
+          <a:xfrm>
+            <a:off x="566928" y="749808"/>
+            <a:ext cx="11057839" cy="877824"/>
+          </a:xfrm>
+          <a:prstGeom prst="rect">
+            <a:avLst/>
+          </a:prstGeom>
+          <a:noFill/>
+        </p:spPr>
+        <p:txBody>
+          <a:bodyPr wrap="square" lIns="0" rIns="0" tIns="0" bIns="0" anchor="t">
+            <a:spAutoFit/>
+          </a:bodyPr>
+          <a:lstStyle/>
+          <a:p>
+            <a:pPr algn="l">
+              <a:lnSpc>
+                <a:spcPct val="115000"/>
+              </a:lnSpc>
+            </a:pPr>
+            <a:r>
+              <a:rPr sz="3400" b="1" i="0">
+                <a:solidFill>
+                  <a:srgbClr val="17181A"/>
+                </a:solidFill>
+                <a:latin typeface="Verdana"/>
+              </a:rPr>
+              <a:t>L'espace direction</a:t>
+            </a:r>
+          </a:p>
+        </p:txBody>
+      </p:sp>
+      <p:sp>
+        <p:nvSpPr>
+          <p:cNvPr id="7" name="TextBox 6"/>
+          <p:cNvSpPr txBox="1"/>
+          <p:nvPr/>
+        </p:nvSpPr>
+        <p:spPr>
+          <a:xfrm>
+            <a:off x="566928" y="1645920"/>
+            <a:ext cx="11057839" cy="617220"/>
+          </a:xfrm>
+          <a:prstGeom prst="rect">
+            <a:avLst/>
+          </a:prstGeom>
+          <a:noFill/>
+        </p:spPr>
+        <p:txBody>
+          <a:bodyPr wrap="square" lIns="0" rIns="0" tIns="0" bIns="0" anchor="t">
+            <a:spAutoFit/>
+          </a:bodyPr>
+          <a:lstStyle/>
+          <a:p>
+            <a:pPr algn="l">
+              <a:lnSpc>
+                <a:spcPct val="135000"/>
+              </a:lnSpc>
+            </a:pPr>
+            <a:r>
+              <a:rPr sz="1800" b="0" i="0">
+                <a:solidFill>
+                  <a:srgbClr val="6E7175"/>
+                </a:solidFill>
+                <a:latin typeface="Verdana"/>
+              </a:rPr>
+              <a:t>Les comptes du centre, les réglages, et la dépense estimée. Aucune réponse d'élève n'y figure.</a:t>
+            </a:r>
+          </a:p>
+        </p:txBody>
+      </p:sp>
+      <p:sp>
+        <p:nvSpPr>
+          <p:cNvPr id="8" name="Rounded Rectangle 7"/>
           <p:cNvSpPr/>
           <p:nvPr/>
         </p:nvSpPr>
         <p:spPr>
           <a:xfrm>
-            <a:off x="566928" y="1225296"/>
-            <a:ext cx="11057839" cy="1967991"/>
+            <a:off x="4447032" y="2372868"/>
+            <a:ext cx="3297631" cy="3799332"/>
           </a:xfrm>
           <a:prstGeom prst="roundRect">
             <a:avLst>
-              <a:gd name="adj" fmla="val 7434"/>
+              <a:gd name="adj" fmla="val 2772"/>
             </a:avLst>
           </a:prstGeom>
           <a:solidFill>
-            <a:srgbClr val="FBEEDC"/>
+            <a:srgbClr val="FFFFFF"/>
           </a:solidFill>
           <a:ln w="12700">
             <a:solidFill>
-              <a:srgbClr val="EAEAE8"/>
+              <a:srgbClr val="D6D6D2"/>
             </a:solidFill>
           </a:ln>
           <a:effectLst/>
@@ -10066,130 +11160,30 @@
           <a:p/>
         </p:txBody>
       </p:sp>
-      <p:sp>
-        <p:nvSpPr>
-          <p:cNvPr id="7" name="TextBox 6"/>
-          <p:cNvSpPr txBox="1"/>
-          <p:nvPr/>
-        </p:nvSpPr>
-        <p:spPr>
-          <a:xfrm>
-            <a:off x="1298448" y="1682496"/>
-            <a:ext cx="9594799" cy="1145032"/>
-          </a:xfrm>
-          <a:prstGeom prst="rect">
-            <a:avLst/>
-          </a:prstGeom>
-          <a:noFill/>
-        </p:spPr>
-        <p:txBody>
-          <a:bodyPr wrap="square" lIns="0" rIns="0" tIns="0" bIns="0" anchor="t">
-            <a:spAutoFit/>
-          </a:bodyPr>
-          <a:lstStyle/>
-          <a:p>
-            <a:pPr algn="l">
-              <a:lnSpc>
-                <a:spcPct val="122000"/>
-              </a:lnSpc>
-            </a:pPr>
-            <a:r>
-              <a:rPr sz="3400" b="1" i="0">
-                <a:solidFill>
-                  <a:srgbClr val="17181A"/>
-                </a:solidFill>
-                <a:latin typeface="Verdana"/>
-              </a:rPr>
-              <a:t>Hors Québec est permis, à trois conditions.</a:t>
-            </a:r>
-          </a:p>
-        </p:txBody>
-      </p:sp>
-      <p:sp>
-        <p:nvSpPr>
-          <p:cNvPr id="8" name="Rounded Rectangle 7"/>
-          <p:cNvSpPr/>
-          <p:nvPr/>
-        </p:nvSpPr>
-        <p:spPr>
-          <a:xfrm>
-            <a:off x="566928" y="3467607"/>
-            <a:ext cx="11057839" cy="2040128"/>
-          </a:xfrm>
-          <a:prstGeom prst="roundRect">
-            <a:avLst>
-              <a:gd name="adj" fmla="val 7171"/>
-            </a:avLst>
-          </a:prstGeom>
-          <a:solidFill>
-            <a:srgbClr val="FFFFFF"/>
-          </a:solidFill>
-          <a:ln w="12700">
-            <a:solidFill>
-              <a:srgbClr val="EAEAE8"/>
-            </a:solidFill>
-          </a:ln>
-          <a:effectLst/>
-        </p:spPr>
-        <p:style>
-          <a:lnRef idx="1">
-            <a:schemeClr val="accent1"/>
-          </a:lnRef>
-          <a:fillRef idx="3">
-            <a:schemeClr val="accent1"/>
-          </a:fillRef>
-          <a:effectRef idx="2">
-            <a:schemeClr val="accent1"/>
-          </a:effectRef>
-          <a:fontRef idx="minor">
-            <a:schemeClr val="lt1"/>
-          </a:fontRef>
-        </p:style>
-        <p:txBody>
-          <a:bodyPr rtlCol="0" anchor="ctr"/>
-          <a:lstStyle/>
-          <a:p/>
-        </p:txBody>
-      </p:sp>
-      <p:sp>
-        <p:nvSpPr>
-          <p:cNvPr id="9" name="TextBox 8"/>
-          <p:cNvSpPr txBox="1"/>
-          <p:nvPr/>
-        </p:nvSpPr>
-        <p:spPr>
-          <a:xfrm>
-            <a:off x="969264" y="3741927"/>
-            <a:ext cx="10234879" cy="1582928"/>
-          </a:xfrm>
-          <a:prstGeom prst="rect">
-            <a:avLst/>
-          </a:prstGeom>
-          <a:noFill/>
-        </p:spPr>
-        <p:txBody>
-          <a:bodyPr wrap="square" lIns="0" rIns="0" tIns="0" bIns="0" anchor="t">
-            <a:spAutoFit/>
-          </a:bodyPr>
-          <a:lstStyle/>
-          <a:p>
-            <a:pPr algn="l">
-              <a:lnSpc>
-                <a:spcPct val="145000"/>
-              </a:lnSpc>
-            </a:pPr>
-            <a:r>
-              <a:rPr sz="2000" b="0" i="0">
-                <a:solidFill>
-                  <a:srgbClr val="4B4F52"/>
-                </a:solidFill>
-                <a:latin typeface="Verdana"/>
-              </a:rPr>
-              <a:t>Une évaluation des facteurs relatifs à la vie privée faite avant la communication ; une conclusion de protection adéquate ; une entente écrite qui en tient compte. Sans évaluation, ce qui est en défaut, c'est le flux — pas l'emplacement du disque.</a:t>
-            </a:r>
-          </a:p>
-        </p:txBody>
-      </p:sp>
+      <p:pic>
+        <p:nvPicPr>
+          <p:cNvPr id="9" name="Picture 8" descr="cas-13-espace-direction.png"/>
+          <p:cNvPicPr>
+            <a:picLocks noChangeAspect="1"/>
+          </p:cNvPicPr>
+          <p:nvPr/>
+        </p:nvPicPr>
+        <p:blipFill>
+          <a:blip r:embed="rId2"/>
+          <a:stretch>
+            <a:fillRect/>
+          </a:stretch>
+        </p:blipFill>
+        <p:spPr>
+          <a:xfrm>
+            <a:off x="4465320" y="2391156"/>
+            <a:ext cx="3261055" cy="3762756"/>
+          </a:xfrm>
+          <a:prstGeom prst="rect">
+            <a:avLst/>
+          </a:prstGeom>
+        </p:spPr>
+      </p:pic>
     </p:spTree>
   </p:cSld>
   <p:clrMapOvr>
@@ -10362,72 +11356,33 @@
                 </a:solidFill>
                 <a:latin typeface="Verdana"/>
               </a:rPr>
-              <a:t>L'IDÉE REÇUE</a:t>
-            </a:r>
-          </a:p>
-        </p:txBody>
-      </p:sp>
-      <p:sp>
-        <p:nvSpPr>
-          <p:cNvPr id="6" name="TextBox 5"/>
-          <p:cNvSpPr txBox="1"/>
-          <p:nvPr/>
-        </p:nvSpPr>
-        <p:spPr>
-          <a:xfrm>
-            <a:off x="566928" y="749808"/>
-            <a:ext cx="11057839" cy="877824"/>
-          </a:xfrm>
-          <a:prstGeom prst="rect">
-            <a:avLst/>
-          </a:prstGeom>
-          <a:noFill/>
-        </p:spPr>
-        <p:txBody>
-          <a:bodyPr wrap="square" lIns="0" rIns="0" tIns="0" bIns="0" anchor="t">
-            <a:spAutoFit/>
-          </a:bodyPr>
-          <a:lstStyle/>
-          <a:p>
-            <a:pPr algn="l">
-              <a:lnSpc>
-                <a:spcPct val="115000"/>
-              </a:lnSpc>
-            </a:pPr>
-            <a:r>
-              <a:rPr sz="3400" b="1" i="0">
-                <a:solidFill>
-                  <a:srgbClr val="17181A"/>
-                </a:solidFill>
-                <a:latin typeface="Verdana"/>
-              </a:rPr>
-              <a:t>Le piège le plus fréquent</a:t>
-            </a:r>
-          </a:p>
-        </p:txBody>
-      </p:sp>
-      <p:sp>
-        <p:nvSpPr>
-          <p:cNvPr id="7" name="Rounded Rectangle 6"/>
+              <a:t>LA RÈGLE DE L'ARTICLE 70.1</a:t>
+            </a:r>
+          </a:p>
+        </p:txBody>
+      </p:sp>
+      <p:sp>
+        <p:nvSpPr>
+          <p:cNvPr id="6" name="Rounded Rectangle 5"/>
           <p:cNvSpPr/>
           <p:nvPr/>
         </p:nvSpPr>
         <p:spPr>
           <a:xfrm>
-            <a:off x="566928" y="1856232"/>
-            <a:ext cx="5428335" cy="2331720"/>
+            <a:off x="566928" y="1225296"/>
+            <a:ext cx="11057839" cy="1967991"/>
           </a:xfrm>
           <a:prstGeom prst="roundRect">
             <a:avLst>
-              <a:gd name="adj" fmla="val 6274"/>
+              <a:gd name="adj" fmla="val 7434"/>
             </a:avLst>
           </a:prstGeom>
           <a:solidFill>
-            <a:srgbClr val="FFF6F5"/>
+            <a:srgbClr val="FBEEDC"/>
           </a:solidFill>
           <a:ln w="12700">
             <a:solidFill>
-              <a:srgbClr val="DC2626"/>
+              <a:srgbClr val="EAEAE8"/>
             </a:solidFill>
           </a:ln>
           <a:effectLst/>
@@ -10454,14 +11409,14 @@
       </p:sp>
       <p:sp>
         <p:nvSpPr>
-          <p:cNvPr id="8" name="TextBox 7"/>
+          <p:cNvPr id="7" name="TextBox 6"/>
           <p:cNvSpPr txBox="1"/>
           <p:nvPr/>
         </p:nvSpPr>
         <p:spPr>
           <a:xfrm>
-            <a:off x="932688" y="2130552"/>
-            <a:ext cx="4696815" cy="274320"/>
+            <a:off x="1298448" y="1682496"/>
+            <a:ext cx="9594799" cy="1145032"/>
           </a:xfrm>
           <a:prstGeom prst="rect">
             <a:avLst/>
@@ -10476,198 +11431,35 @@
           <a:p>
             <a:pPr algn="l">
               <a:lnSpc>
-                <a:spcPct val="135000"/>
+                <a:spcPct val="122000"/>
               </a:lnSpc>
             </a:pPr>
             <a:r>
-              <a:rPr sz="1300" b="1" i="0" spc="156">
-                <a:solidFill>
-                  <a:srgbClr val="B91C1C"/>
+              <a:rPr sz="3400" b="1" i="0">
+                <a:solidFill>
+                  <a:srgbClr val="17181A"/>
                 </a:solidFill>
                 <a:latin typeface="Verdana"/>
               </a:rPr>
-              <a:t>ON ENTEND SOUVENT</a:t>
-            </a:r>
-          </a:p>
-        </p:txBody>
-      </p:sp>
-      <p:sp>
-        <p:nvSpPr>
-          <p:cNvPr id="9" name="TextBox 8"/>
-          <p:cNvSpPr txBox="1"/>
-          <p:nvPr/>
-        </p:nvSpPr>
-        <p:spPr>
-          <a:xfrm>
-            <a:off x="932688" y="2569464"/>
-            <a:ext cx="4696815" cy="1417320"/>
-          </a:xfrm>
-          <a:prstGeom prst="rect">
-            <a:avLst/>
-          </a:prstGeom>
-          <a:noFill/>
-        </p:spPr>
-        <p:txBody>
-          <a:bodyPr wrap="square" lIns="0" rIns="0" tIns="0" bIns="0" anchor="t">
-            <a:spAutoFit/>
-          </a:bodyPr>
-          <a:lstStyle/>
-          <a:p>
-            <a:pPr algn="l">
-              <a:lnSpc>
-                <a:spcPct val="130000"/>
-              </a:lnSpc>
-            </a:pPr>
-            <a:r>
-              <a:rPr sz="2500" b="1" i="0">
-                <a:solidFill>
-                  <a:srgbClr val="17181A"/>
-                </a:solidFill>
-                <a:latin typeface="Verdana"/>
-              </a:rPr>
-              <a:t>« Il faut héberger au Québec. »</a:t>
-            </a:r>
-          </a:p>
-        </p:txBody>
-      </p:sp>
-      <p:sp>
-        <p:nvSpPr>
-          <p:cNvPr id="10" name="Rounded Rectangle 9"/>
+              <a:t>Hors Québec est permis, à trois conditions.</a:t>
+            </a:r>
+          </a:p>
+        </p:txBody>
+      </p:sp>
+      <p:sp>
+        <p:nvSpPr>
+          <p:cNvPr id="8" name="Rounded Rectangle 7"/>
           <p:cNvSpPr/>
           <p:nvPr/>
         </p:nvSpPr>
         <p:spPr>
           <a:xfrm>
-            <a:off x="6196431" y="1856232"/>
-            <a:ext cx="5428335" cy="2331720"/>
+            <a:off x="566928" y="3467607"/>
+            <a:ext cx="11057839" cy="2040128"/>
           </a:xfrm>
           <a:prstGeom prst="roundRect">
             <a:avLst>
-              <a:gd name="adj" fmla="val 6274"/>
-            </a:avLst>
-          </a:prstGeom>
-          <a:solidFill>
-            <a:srgbClr val="E6F5EE"/>
-          </a:solidFill>
-          <a:ln w="12700">
-            <a:solidFill>
-              <a:srgbClr val="0A8F5B"/>
-            </a:solidFill>
-          </a:ln>
-          <a:effectLst/>
-        </p:spPr>
-        <p:style>
-          <a:lnRef idx="1">
-            <a:schemeClr val="accent1"/>
-          </a:lnRef>
-          <a:fillRef idx="3">
-            <a:schemeClr val="accent1"/>
-          </a:fillRef>
-          <a:effectRef idx="2">
-            <a:schemeClr val="accent1"/>
-          </a:effectRef>
-          <a:fontRef idx="minor">
-            <a:schemeClr val="lt1"/>
-          </a:fontRef>
-        </p:style>
-        <p:txBody>
-          <a:bodyPr rtlCol="0" anchor="ctr"/>
-          <a:lstStyle/>
-          <a:p/>
-        </p:txBody>
-      </p:sp>
-      <p:sp>
-        <p:nvSpPr>
-          <p:cNvPr id="11" name="TextBox 10"/>
-          <p:cNvSpPr txBox="1"/>
-          <p:nvPr/>
-        </p:nvSpPr>
-        <p:spPr>
-          <a:xfrm>
-            <a:off x="6562191" y="2130552"/>
-            <a:ext cx="4696815" cy="274320"/>
-          </a:xfrm>
-          <a:prstGeom prst="rect">
-            <a:avLst/>
-          </a:prstGeom>
-          <a:noFill/>
-        </p:spPr>
-        <p:txBody>
-          <a:bodyPr wrap="square" lIns="0" rIns="0" tIns="0" bIns="0" anchor="t">
-            <a:spAutoFit/>
-          </a:bodyPr>
-          <a:lstStyle/>
-          <a:p>
-            <a:pPr algn="l">
-              <a:lnSpc>
-                <a:spcPct val="135000"/>
-              </a:lnSpc>
-            </a:pPr>
-            <a:r>
-              <a:rPr sz="1300" b="1" i="0" spc="156">
-                <a:solidFill>
-                  <a:srgbClr val="07734A"/>
-                </a:solidFill>
-                <a:latin typeface="Verdana"/>
-              </a:rPr>
-              <a:t>IL FAUT DIRE PLUTÔT</a:t>
-            </a:r>
-          </a:p>
-        </p:txBody>
-      </p:sp>
-      <p:sp>
-        <p:nvSpPr>
-          <p:cNvPr id="12" name="TextBox 11"/>
-          <p:cNvSpPr txBox="1"/>
-          <p:nvPr/>
-        </p:nvSpPr>
-        <p:spPr>
-          <a:xfrm>
-            <a:off x="6562191" y="2569464"/>
-            <a:ext cx="4696815" cy="1417320"/>
-          </a:xfrm>
-          <a:prstGeom prst="rect">
-            <a:avLst/>
-          </a:prstGeom>
-          <a:noFill/>
-        </p:spPr>
-        <p:txBody>
-          <a:bodyPr wrap="square" lIns="0" rIns="0" tIns="0" bIns="0" anchor="t">
-            <a:spAutoFit/>
-          </a:bodyPr>
-          <a:lstStyle/>
-          <a:p>
-            <a:pPr algn="l">
-              <a:lnSpc>
-                <a:spcPct val="130000"/>
-              </a:lnSpc>
-            </a:pPr>
-            <a:r>
-              <a:rPr sz="2500" b="1" i="0">
-                <a:solidFill>
-                  <a:srgbClr val="17181A"/>
-                </a:solidFill>
-                <a:latin typeface="Verdana"/>
-              </a:rPr>
-              <a:t>« Il faut avoir fait l'évaluation, et l'avoir écrite. »</a:t>
-            </a:r>
-          </a:p>
-        </p:txBody>
-      </p:sp>
-      <p:sp>
-        <p:nvSpPr>
-          <p:cNvPr id="13" name="Rounded Rectangle 12"/>
-          <p:cNvSpPr/>
-          <p:nvPr/>
-        </p:nvSpPr>
-        <p:spPr>
-          <a:xfrm>
-            <a:off x="566928" y="4462272"/>
-            <a:ext cx="11057839" cy="1285240"/>
-          </a:xfrm>
-          <a:prstGeom prst="roundRect">
-            <a:avLst>
-              <a:gd name="adj" fmla="val 11383"/>
+              <a:gd name="adj" fmla="val 7171"/>
             </a:avLst>
           </a:prstGeom>
           <a:solidFill>
@@ -10702,14 +11494,14 @@
       </p:sp>
       <p:sp>
         <p:nvSpPr>
-          <p:cNvPr id="14" name="TextBox 13"/>
+          <p:cNvPr id="9" name="TextBox 8"/>
           <p:cNvSpPr txBox="1"/>
           <p:nvPr/>
         </p:nvSpPr>
         <p:spPr>
           <a:xfrm>
-            <a:off x="969264" y="4736592"/>
-            <a:ext cx="10234879" cy="782320"/>
+            <a:off x="969264" y="3741927"/>
+            <a:ext cx="10234879" cy="1582928"/>
           </a:xfrm>
           <a:prstGeom prst="rect">
             <a:avLst/>
@@ -10734,7 +11526,7 @@
                 </a:solidFill>
                 <a:latin typeface="Verdana"/>
               </a:rPr>
-              <a:t>C'est une condition à la sortie, pas une frontière fermée. L'inventaire des flux existe justement pour alimenter cette évaluation.</a:t>
+              <a:t>Une évaluation des facteurs relatifs à la vie privée faite avant la communication ; une conclusion de protection adéquate ; une entente écrite qui en tient compte. Sans évaluation, ce qui est en défaut, c'est le flux — pas l'emplacement du disque.</a:t>
             </a:r>
           </a:p>
         </p:txBody>
